--- a/AgenticAI/5-Tools-and-Framework-RAG/AgenticRAG_vs_TradtionalRAG.pptx
+++ b/AgenticAI/5-Tools-and-Framework-RAG/AgenticRAG_vs_TradtionalRAG.pptx
@@ -5,21 +5,22 @@
     <p:sldMasterId id="2147483648" r:id="rId1"/>
   </p:sldMasterIdLst>
   <p:notesMasterIdLst>
-    <p:notesMasterId r:id="rId11"/>
+    <p:notesMasterId r:id="rId12"/>
   </p:notesMasterIdLst>
   <p:handoutMasterIdLst>
-    <p:handoutMasterId r:id="rId12"/>
+    <p:handoutMasterId r:id="rId13"/>
   </p:handoutMasterIdLst>
   <p:sldIdLst>
     <p:sldId id="257" r:id="rId2"/>
     <p:sldId id="276" r:id="rId3"/>
     <p:sldId id="279" r:id="rId4"/>
-    <p:sldId id="277" r:id="rId5"/>
-    <p:sldId id="278" r:id="rId6"/>
-    <p:sldId id="280" r:id="rId7"/>
-    <p:sldId id="281" r:id="rId8"/>
-    <p:sldId id="282" r:id="rId9"/>
-    <p:sldId id="275" r:id="rId10"/>
+    <p:sldId id="283" r:id="rId5"/>
+    <p:sldId id="277" r:id="rId6"/>
+    <p:sldId id="278" r:id="rId7"/>
+    <p:sldId id="280" r:id="rId8"/>
+    <p:sldId id="281" r:id="rId9"/>
+    <p:sldId id="282" r:id="rId10"/>
+    <p:sldId id="275" r:id="rId11"/>
   </p:sldIdLst>
   <p:sldSz cx="12192000" cy="6858000"/>
   <p:notesSz cx="6858000" cy="9144000"/>
@@ -223,7 +224,7 @@
           <a:p>
             <a:fld id="{7BAEECA8-D063-486F-AE31-5020270C1449}" type="datetimeFigureOut">
               <a:rPr lang="en-US" smtClean="0"/>
-              <a:t>8/29/2026</a:t>
+              <a:t>9/22/2026</a:t>
             </a:fld>
             <a:endParaRPr lang="en-US"/>
           </a:p>
@@ -400,7 +401,7 @@
           <a:p>
             <a:fld id="{CB233BD1-3BA8-448D-9D08-7846095EA517}" type="datetimeFigureOut">
               <a:rPr lang="en-US" smtClean="0"/>
-              <a:t>8/29/2026</a:t>
+              <a:t>9/22/2026</a:t>
             </a:fld>
             <a:endParaRPr lang="en-US"/>
           </a:p>
@@ -814,7 +815,7 @@
           <a:p>
             <a:fld id="{6383FAE1-13DE-4511-8C1B-C8AFB720664C}" type="datetimeFigureOut">
               <a:rPr lang="en-US" smtClean="0"/>
-              <a:t>8/29/2026</a:t>
+              <a:t>9/22/2026</a:t>
             </a:fld>
             <a:endParaRPr lang="en-US"/>
           </a:p>
@@ -1012,7 +1013,7 @@
           <a:p>
             <a:fld id="{6383FAE1-13DE-4511-8C1B-C8AFB720664C}" type="datetimeFigureOut">
               <a:rPr lang="en-US" smtClean="0"/>
-              <a:t>8/29/2026</a:t>
+              <a:t>9/22/2026</a:t>
             </a:fld>
             <a:endParaRPr lang="en-US"/>
           </a:p>
@@ -1220,7 +1221,7 @@
           <a:p>
             <a:fld id="{6383FAE1-13DE-4511-8C1B-C8AFB720664C}" type="datetimeFigureOut">
               <a:rPr lang="en-US" smtClean="0"/>
-              <a:t>8/29/2026</a:t>
+              <a:t>9/22/2026</a:t>
             </a:fld>
             <a:endParaRPr lang="en-US"/>
           </a:p>
@@ -1418,7 +1419,7 @@
           <a:p>
             <a:fld id="{6383FAE1-13DE-4511-8C1B-C8AFB720664C}" type="datetimeFigureOut">
               <a:rPr lang="en-US" smtClean="0"/>
-              <a:t>8/29/2026</a:t>
+              <a:t>9/22/2026</a:t>
             </a:fld>
             <a:endParaRPr lang="en-US"/>
           </a:p>
@@ -1693,7 +1694,7 @@
           <a:p>
             <a:fld id="{6383FAE1-13DE-4511-8C1B-C8AFB720664C}" type="datetimeFigureOut">
               <a:rPr lang="en-US" smtClean="0"/>
-              <a:t>8/29/2026</a:t>
+              <a:t>9/22/2026</a:t>
             </a:fld>
             <a:endParaRPr lang="en-US"/>
           </a:p>
@@ -1958,7 +1959,7 @@
           <a:p>
             <a:fld id="{6383FAE1-13DE-4511-8C1B-C8AFB720664C}" type="datetimeFigureOut">
               <a:rPr lang="en-US" smtClean="0"/>
-              <a:t>8/29/2026</a:t>
+              <a:t>9/22/2026</a:t>
             </a:fld>
             <a:endParaRPr lang="en-US"/>
           </a:p>
@@ -2370,7 +2371,7 @@
           <a:p>
             <a:fld id="{6383FAE1-13DE-4511-8C1B-C8AFB720664C}" type="datetimeFigureOut">
               <a:rPr lang="en-US" smtClean="0"/>
-              <a:t>8/29/2026</a:t>
+              <a:t>9/22/2026</a:t>
             </a:fld>
             <a:endParaRPr lang="en-US"/>
           </a:p>
@@ -2511,7 +2512,7 @@
           <a:p>
             <a:fld id="{6383FAE1-13DE-4511-8C1B-C8AFB720664C}" type="datetimeFigureOut">
               <a:rPr lang="en-US" smtClean="0"/>
-              <a:t>8/29/2026</a:t>
+              <a:t>9/22/2026</a:t>
             </a:fld>
             <a:endParaRPr lang="en-US"/>
           </a:p>
@@ -2624,7 +2625,7 @@
           <a:p>
             <a:fld id="{6383FAE1-13DE-4511-8C1B-C8AFB720664C}" type="datetimeFigureOut">
               <a:rPr lang="en-US" smtClean="0"/>
-              <a:t>8/29/2026</a:t>
+              <a:t>9/22/2026</a:t>
             </a:fld>
             <a:endParaRPr lang="en-US"/>
           </a:p>
@@ -2935,7 +2936,7 @@
           <a:p>
             <a:fld id="{6383FAE1-13DE-4511-8C1B-C8AFB720664C}" type="datetimeFigureOut">
               <a:rPr lang="en-US" smtClean="0"/>
-              <a:t>8/29/2026</a:t>
+              <a:t>9/22/2026</a:t>
             </a:fld>
             <a:endParaRPr lang="en-US"/>
           </a:p>
@@ -3226,7 +3227,7 @@
           <a:p>
             <a:fld id="{6383FAE1-13DE-4511-8C1B-C8AFB720664C}" type="datetimeFigureOut">
               <a:rPr lang="en-US" smtClean="0"/>
-              <a:t>8/29/2026</a:t>
+              <a:t>9/22/2026</a:t>
             </a:fld>
             <a:endParaRPr lang="en-US"/>
           </a:p>
@@ -3470,7 +3471,7 @@
           <a:p>
             <a:fld id="{6383FAE1-13DE-4511-8C1B-C8AFB720664C}" type="datetimeFigureOut">
               <a:rPr lang="en-US" smtClean="0"/>
-              <a:t>8/29/2026</a:t>
+              <a:t>9/22/2026</a:t>
             </a:fld>
             <a:endParaRPr lang="en-US"/>
           </a:p>
@@ -4087,6 +4088,204 @@
 </p:sld>
 </file>
 
+<file path=ppt/slides/slide10.xml><?xml version="1.0" encoding="utf-8"?>
+<p:sld xmlns:a="http://schemas.openxmlformats.org/drawingml/2006/main" xmlns:r="http://schemas.openxmlformats.org/officeDocument/2006/relationships" xmlns:p="http://schemas.openxmlformats.org/presentationml/2006/main">
+  <p:cSld>
+    <p:spTree>
+      <p:nvGrpSpPr>
+        <p:cNvPr id="1" name="">
+          <a:extLst>
+            <a:ext uri="{FF2B5EF4-FFF2-40B4-BE49-F238E27FC236}">
+              <a16:creationId xmlns:a16="http://schemas.microsoft.com/office/drawing/2014/main" id="{DD931D7F-4279-DA2E-FA64-6CF3C441D414}"/>
+            </a:ext>
+          </a:extLst>
+        </p:cNvPr>
+        <p:cNvGrpSpPr/>
+        <p:nvPr/>
+      </p:nvGrpSpPr>
+      <p:grpSpPr>
+        <a:xfrm>
+          <a:off x="0" y="0"/>
+          <a:ext cx="0" cy="0"/>
+          <a:chOff x="0" y="0"/>
+          <a:chExt cx="0" cy="0"/>
+        </a:xfrm>
+      </p:grpSpPr>
+      <p:sp>
+        <p:nvSpPr>
+          <p:cNvPr id="2" name="Title 1">
+            <a:extLst>
+              <a:ext uri="{FF2B5EF4-FFF2-40B4-BE49-F238E27FC236}">
+                <a16:creationId xmlns:a16="http://schemas.microsoft.com/office/drawing/2014/main" id="{795E1B75-886E-0812-B2FD-DD250C225521}"/>
+              </a:ext>
+            </a:extLst>
+          </p:cNvPr>
+          <p:cNvSpPr>
+            <a:spLocks noGrp="1"/>
+          </p:cNvSpPr>
+          <p:nvPr>
+            <p:ph type="title"/>
+          </p:nvPr>
+        </p:nvSpPr>
+        <p:spPr>
+          <a:xfrm>
+            <a:off x="274320" y="136525"/>
+            <a:ext cx="11466576" cy="832739"/>
+          </a:xfrm>
+        </p:spPr>
+        <p:txBody>
+          <a:bodyPr>
+            <a:normAutofit/>
+          </a:bodyPr>
+          <a:lstStyle/>
+          <a:p>
+            <a:r>
+              <a:rPr lang="en-US" sz="3600" dirty="0"/>
+              <a:t>EXTRA</a:t>
+            </a:r>
+          </a:p>
+        </p:txBody>
+      </p:sp>
+      <p:sp>
+        <p:nvSpPr>
+          <p:cNvPr id="4" name="TextBox 3">
+            <a:extLst>
+              <a:ext uri="{FF2B5EF4-FFF2-40B4-BE49-F238E27FC236}">
+                <a16:creationId xmlns:a16="http://schemas.microsoft.com/office/drawing/2014/main" id="{902F8BE4-9CEA-0DAD-0357-E0A8215F169D}"/>
+              </a:ext>
+            </a:extLst>
+          </p:cNvPr>
+          <p:cNvSpPr txBox="1"/>
+          <p:nvPr/>
+        </p:nvSpPr>
+        <p:spPr>
+          <a:xfrm>
+            <a:off x="274320" y="933117"/>
+            <a:ext cx="11658600" cy="1477328"/>
+          </a:xfrm>
+          <a:prstGeom prst="rect">
+            <a:avLst/>
+          </a:prstGeom>
+          <a:noFill/>
+        </p:spPr>
+        <p:txBody>
+          <a:bodyPr wrap="square">
+            <a:spAutoFit/>
+          </a:bodyPr>
+          <a:lstStyle/>
+          <a:p>
+            <a:pPr marL="0" indent="0">
+              <a:buNone/>
+            </a:pPr>
+            <a:r>
+              <a:rPr lang="en-US" dirty="0" err="1">
+                <a:solidFill>
+                  <a:schemeClr val="accent6">
+                    <a:lumMod val="60000"/>
+                    <a:lumOff val="40000"/>
+                  </a:schemeClr>
+                </a:solidFill>
+              </a:rPr>
+              <a:t>Ffnbksdfd</a:t>
+            </a:r>
+            <a:endParaRPr lang="en-US" dirty="0">
+              <a:solidFill>
+                <a:schemeClr val="accent6">
+                  <a:lumMod val="60000"/>
+                  <a:lumOff val="40000"/>
+                </a:schemeClr>
+              </a:solidFill>
+            </a:endParaRPr>
+          </a:p>
+          <a:p>
+            <a:pPr marL="0" indent="0">
+              <a:buNone/>
+            </a:pPr>
+            <a:r>
+              <a:rPr lang="en-US" dirty="0" err="1">
+                <a:solidFill>
+                  <a:schemeClr val="accent6">
+                    <a:lumMod val="60000"/>
+                    <a:lumOff val="40000"/>
+                  </a:schemeClr>
+                </a:solidFill>
+              </a:rPr>
+              <a:t>Fdslj;f</a:t>
+            </a:r>
+            <a:endParaRPr lang="en-US" dirty="0">
+              <a:solidFill>
+                <a:schemeClr val="accent6">
+                  <a:lumMod val="60000"/>
+                  <a:lumOff val="40000"/>
+                </a:schemeClr>
+              </a:solidFill>
+            </a:endParaRPr>
+          </a:p>
+          <a:p>
+            <a:pPr marL="0" indent="0">
+              <a:buNone/>
+            </a:pPr>
+            <a:endParaRPr lang="en-US" dirty="0">
+              <a:solidFill>
+                <a:schemeClr val="accent6">
+                  <a:lumMod val="60000"/>
+                  <a:lumOff val="40000"/>
+                </a:schemeClr>
+              </a:solidFill>
+            </a:endParaRPr>
+          </a:p>
+          <a:p>
+            <a:pPr marL="0" indent="0">
+              <a:buNone/>
+            </a:pPr>
+            <a:r>
+              <a:rPr lang="en-US" dirty="0" err="1">
+                <a:solidFill>
+                  <a:schemeClr val="accent6">
+                    <a:lumMod val="60000"/>
+                    <a:lumOff val="40000"/>
+                  </a:schemeClr>
+                </a:solidFill>
+              </a:rPr>
+              <a:t>Fl;ds</a:t>
+            </a:r>
+            <a:endParaRPr lang="en-US" dirty="0">
+              <a:solidFill>
+                <a:schemeClr val="accent6">
+                  <a:lumMod val="60000"/>
+                  <a:lumOff val="40000"/>
+                </a:schemeClr>
+              </a:solidFill>
+            </a:endParaRPr>
+          </a:p>
+          <a:p>
+            <a:pPr marL="0" indent="0">
+              <a:buNone/>
+            </a:pPr>
+            <a:endParaRPr lang="en-US" dirty="0">
+              <a:solidFill>
+                <a:schemeClr val="accent6">
+                  <a:lumMod val="60000"/>
+                  <a:lumOff val="40000"/>
+                </a:schemeClr>
+              </a:solidFill>
+            </a:endParaRPr>
+          </a:p>
+        </p:txBody>
+      </p:sp>
+    </p:spTree>
+    <p:extLst>
+      <p:ext uri="{BB962C8B-B14F-4D97-AF65-F5344CB8AC3E}">
+        <p14:creationId xmlns:p14="http://schemas.microsoft.com/office/powerpoint/2010/main" val="366625378"/>
+      </p:ext>
+    </p:extLst>
+  </p:cSld>
+  <p:clrMapOvr>
+    <a:masterClrMapping/>
+  </p:clrMapOvr>
+</p:sld>
+</file>
+
 <file path=ppt/slides/slide2.xml><?xml version="1.0" encoding="utf-8"?>
 <p:sld xmlns:a="http://schemas.openxmlformats.org/drawingml/2006/main" xmlns:r="http://schemas.openxmlformats.org/officeDocument/2006/relationships" xmlns:p="http://schemas.openxmlformats.org/presentationml/2006/main">
   <p:cSld>
@@ -4333,7 +4532,7 @@
         </p:nvSpPr>
         <p:spPr>
           <a:xfrm>
-            <a:off x="8081045" y="5191795"/>
+            <a:off x="8081045" y="5667283"/>
             <a:ext cx="1566672" cy="1100328"/>
           </a:xfrm>
           <a:prstGeom prst="ellipse">
@@ -4382,7 +4581,7 @@
         </p:nvSpPr>
         <p:spPr>
           <a:xfrm>
-            <a:off x="8081045" y="3178665"/>
+            <a:off x="8081045" y="3891897"/>
             <a:ext cx="1479351" cy="962184"/>
           </a:xfrm>
           <a:prstGeom prst="ellipse">
@@ -4430,8 +4629,8 @@
           <p:nvPr/>
         </p:nvSpPr>
         <p:spPr>
-          <a:xfrm>
-            <a:off x="7502106" y="3340019"/>
+          <a:xfrm rot="2308375">
+            <a:off x="7404496" y="3789935"/>
             <a:ext cx="579360" cy="539496"/>
           </a:xfrm>
           <a:prstGeom prst="rightArrow">
@@ -4476,8 +4675,8 @@
           <p:nvPr/>
         </p:nvSpPr>
         <p:spPr>
-          <a:xfrm>
-            <a:off x="9595947" y="3427238"/>
+          <a:xfrm rot="19171423">
+            <a:off x="9552414" y="3740760"/>
             <a:ext cx="669418" cy="539496"/>
           </a:xfrm>
           <a:prstGeom prst="rightArrow">
@@ -4523,7 +4722,7 @@
         </p:nvSpPr>
         <p:spPr>
           <a:xfrm rot="5400000">
-            <a:off x="8197602" y="4369975"/>
+            <a:off x="8197602" y="4955191"/>
             <a:ext cx="704596" cy="539496"/>
           </a:xfrm>
           <a:prstGeom prst="rightArrow">
@@ -4569,7 +4768,7 @@
         </p:nvSpPr>
         <p:spPr>
           <a:xfrm rot="10800000">
-            <a:off x="7502106" y="2708737"/>
+            <a:off x="7508510" y="2946535"/>
             <a:ext cx="2711742" cy="539496"/>
           </a:xfrm>
           <a:prstGeom prst="rightArrow">
@@ -4615,7 +4814,7 @@
         </p:nvSpPr>
         <p:spPr>
           <a:xfrm>
-            <a:off x="7539501" y="3823882"/>
+            <a:off x="7177598" y="4119426"/>
             <a:ext cx="367408" cy="523220"/>
           </a:xfrm>
           <a:prstGeom prst="rect">
@@ -4657,7 +4856,7 @@
         </p:nvSpPr>
         <p:spPr>
           <a:xfrm>
-            <a:off x="7765966" y="4668575"/>
+            <a:off x="7765966" y="5253791"/>
             <a:ext cx="367408" cy="523220"/>
           </a:xfrm>
           <a:prstGeom prst="rect">
@@ -4699,7 +4898,7 @@
         </p:nvSpPr>
         <p:spPr>
           <a:xfrm>
-            <a:off x="9679690" y="3857816"/>
+            <a:off x="9800992" y="4208053"/>
             <a:ext cx="367408" cy="523220"/>
           </a:xfrm>
           <a:prstGeom prst="rect">
@@ -4741,7 +4940,7 @@
         </p:nvSpPr>
         <p:spPr>
           <a:xfrm>
-            <a:off x="8539537" y="2431593"/>
+            <a:off x="8635944" y="2675645"/>
             <a:ext cx="367408" cy="523220"/>
           </a:xfrm>
           <a:prstGeom prst="rect">
@@ -4783,7 +4982,7 @@
         </p:nvSpPr>
         <p:spPr>
           <a:xfrm rot="16200000">
-            <a:off x="8704276" y="4308139"/>
+            <a:off x="8704276" y="4893355"/>
             <a:ext cx="704596" cy="539496"/>
           </a:xfrm>
           <a:prstGeom prst="rightArrow">
@@ -4829,7 +5028,7 @@
         </p:nvSpPr>
         <p:spPr>
           <a:xfrm>
-            <a:off x="9230401" y="4668575"/>
+            <a:off x="9230401" y="5089199"/>
             <a:ext cx="367408" cy="523220"/>
           </a:xfrm>
           <a:prstGeom prst="rect">
@@ -4872,7 +5071,7 @@
         <p:spPr>
           <a:xfrm>
             <a:off x="0" y="616744"/>
-            <a:ext cx="7058304" cy="5632311"/>
+            <a:ext cx="7065488" cy="5632311"/>
           </a:xfrm>
           <a:prstGeom prst="rect">
             <a:avLst/>
@@ -5133,7 +5332,7 @@
         <p:spPr>
           <a:xfrm>
             <a:off x="182880" y="830997"/>
-            <a:ext cx="8065008" cy="5824671"/>
+            <a:ext cx="8623064" cy="2900794"/>
           </a:xfrm>
           <a:prstGeom prst="rect">
             <a:avLst/>
@@ -5268,46 +5467,26 @@
               <a:buFont typeface="+mj-lt"/>
               <a:buAutoNum type="arabicPeriod"/>
             </a:pPr>
-            <a:r>
-              <a:rPr lang="en-US" sz="2000" b="1" u="none" strike="noStrike" dirty="0">
-                <a:solidFill>
-                  <a:schemeClr val="accent6">
-                    <a:lumMod val="60000"/>
-                    <a:lumOff val="40000"/>
-                  </a:schemeClr>
-                </a:solidFill>
-                <a:effectLst/>
-                <a:latin typeface="+mn-lt"/>
-              </a:rPr>
-              <a:t>Retrieval:</a:t>
-            </a:r>
-            <a:r>
-              <a:rPr lang="en-US" sz="2000" b="0" u="none" strike="noStrike" dirty="0">
-                <a:solidFill>
-                  <a:schemeClr val="accent6">
-                    <a:lumMod val="60000"/>
-                    <a:lumOff val="40000"/>
-                  </a:schemeClr>
-                </a:solidFill>
-                <a:effectLst/>
-                <a:latin typeface="+mn-lt"/>
-              </a:rPr>
-              <a:t> It searches the vector database for text blocks matching that vector. It pulls a messy mix of Q2 financial spreadsheets, competitor analysis folders, and marketing strategy presentations.</a:t>
-            </a:r>
-          </a:p>
-          <a:p>
-            <a:pPr marL="342900" marR="0" lvl="0" indent="-342900">
+            <a:endParaRPr lang="en-US" sz="2000" dirty="0">
+              <a:solidFill>
+                <a:schemeClr val="accent6">
+                  <a:lumMod val="60000"/>
+                  <a:lumOff val="40000"/>
+                </a:schemeClr>
+              </a:solidFill>
+            </a:endParaRPr>
+          </a:p>
+          <a:p>
+            <a:pPr marR="0" lvl="0">
               <a:spcBef>
                 <a:spcPts val="900"/>
               </a:spcBef>
               <a:spcAft>
                 <a:spcPts val="900"/>
               </a:spcAft>
-              <a:buFont typeface="+mj-lt"/>
-              <a:buAutoNum type="arabicPeriod"/>
             </a:pPr>
             <a:r>
-              <a:rPr lang="en-US" sz="2000" b="1" u="none" strike="noStrike" dirty="0">
+              <a:rPr lang="en-US" sz="2000" b="0" u="none" strike="noStrike" dirty="0" err="1">
                 <a:solidFill>
                   <a:schemeClr val="accent6">
                     <a:lumMod val="60000"/>
@@ -5317,7 +5496,7 @@
                 <a:effectLst/>
                 <a:latin typeface="+mn-lt"/>
               </a:rPr>
-              <a:t>The Bottleneck:</a:t>
+              <a:t>Cont</a:t>
             </a:r>
             <a:r>
               <a:rPr lang="en-US" sz="2000" b="0" u="none" strike="noStrike" dirty="0">
@@ -5330,116 +5509,17 @@
                 <a:effectLst/>
                 <a:latin typeface="+mn-lt"/>
               </a:rPr>
-              <a:t> Because it does only one search, the top 5 retrieved chunks might contain our Q2 revenue numbers, but completely miss the competitor's data or the specific marketing strategy insights.</a:t>
-            </a:r>
-          </a:p>
-          <a:p>
-            <a:pPr marL="342900" marR="0" lvl="0" indent="-342900">
-              <a:spcBef>
-                <a:spcPts val="900"/>
-              </a:spcBef>
-              <a:spcAft>
-                <a:spcPts val="900"/>
-              </a:spcAft>
-              <a:buFont typeface="+mj-lt"/>
-              <a:buAutoNum type="arabicPeriod"/>
-            </a:pPr>
-            <a:r>
-              <a:rPr lang="en-US" sz="2000" b="1" u="none" strike="noStrike" dirty="0">
-                <a:solidFill>
-                  <a:schemeClr val="accent6">
-                    <a:lumMod val="60000"/>
-                    <a:lumOff val="40000"/>
-                  </a:schemeClr>
-                </a:solidFill>
-                <a:effectLst/>
-                <a:latin typeface="+mn-lt"/>
-              </a:rPr>
-              <a:t>Generation:</a:t>
-            </a:r>
-            <a:r>
-              <a:rPr lang="en-US" sz="2000" b="0" u="none" strike="noStrike" dirty="0">
-                <a:solidFill>
-                  <a:schemeClr val="accent6">
-                    <a:lumMod val="60000"/>
-                    <a:lumOff val="40000"/>
-                  </a:schemeClr>
-                </a:solidFill>
-                <a:effectLst/>
-                <a:latin typeface="+mn-lt"/>
-              </a:rPr>
-              <a:t> The LLM gets a prompt stuffed with incomplete fragments.</a:t>
-            </a:r>
-          </a:p>
-          <a:p>
-            <a:pPr marL="342900" marR="0" lvl="0" indent="-342900">
-              <a:spcBef>
-                <a:spcPts val="900"/>
-              </a:spcBef>
-              <a:spcAft>
-                <a:spcPts val="900"/>
-              </a:spcAft>
-              <a:buFont typeface="+mj-lt"/>
-              <a:buAutoNum type="arabicPeriod"/>
-            </a:pPr>
-            <a:r>
-              <a:rPr lang="en-US" sz="2000" b="1" u="none" strike="noStrike" dirty="0">
-                <a:solidFill>
-                  <a:schemeClr val="accent6">
-                    <a:lumMod val="60000"/>
-                    <a:lumOff val="40000"/>
-                  </a:schemeClr>
-                </a:solidFill>
-                <a:effectLst/>
-                <a:latin typeface="+mn-lt"/>
-              </a:rPr>
-              <a:t>Output:</a:t>
-            </a:r>
-            <a:r>
-              <a:rPr lang="en-US" sz="2000" b="0" u="none" strike="noStrike" dirty="0">
-                <a:solidFill>
-                  <a:schemeClr val="accent6">
-                    <a:lumMod val="60000"/>
-                    <a:lumOff val="40000"/>
-                  </a:schemeClr>
-                </a:solidFill>
-                <a:effectLst/>
-                <a:latin typeface="+mn-lt"/>
-              </a:rPr>
-              <a:t> </a:t>
-            </a:r>
-            <a:r>
-              <a:rPr lang="en-US" sz="2000" b="0" i="1" u="none" strike="noStrike" dirty="0">
-                <a:solidFill>
-                  <a:schemeClr val="accent6">
-                    <a:lumMod val="60000"/>
-                    <a:lumOff val="40000"/>
-                  </a:schemeClr>
-                </a:solidFill>
-                <a:effectLst/>
-                <a:latin typeface="+mn-lt"/>
-              </a:rPr>
-              <a:t>"According to our documents, Q2 revenue was $10M. However, I cannot find data on our competitor's revenue or the specific marketing ROI breakdown in the context provided."</a:t>
-            </a:r>
-            <a:endParaRPr lang="en-US" sz="2000" b="0" u="none" strike="noStrike" dirty="0">
-              <a:solidFill>
-                <a:schemeClr val="accent6">
-                  <a:lumMod val="60000"/>
-                  <a:lumOff val="40000"/>
-                </a:schemeClr>
-              </a:solidFill>
-              <a:effectLst/>
-              <a:latin typeface="+mn-lt"/>
-            </a:endParaRPr>
-          </a:p>
-        </p:txBody>
-      </p:sp>
-      <p:sp>
-        <p:nvSpPr>
-          <p:cNvPr id="5" name="Oval 4">
-            <a:extLst>
-              <a:ext uri="{FF2B5EF4-FFF2-40B4-BE49-F238E27FC236}">
-                <a16:creationId xmlns:a16="http://schemas.microsoft.com/office/drawing/2014/main" id="{9B8FA5D9-735B-AE54-4C16-9C3328B2C205}"/>
+              <a:t>….</a:t>
+            </a:r>
+          </a:p>
+        </p:txBody>
+      </p:sp>
+      <p:sp>
+        <p:nvSpPr>
+          <p:cNvPr id="4" name="Oval 3">
+            <a:extLst>
+              <a:ext uri="{FF2B5EF4-FFF2-40B4-BE49-F238E27FC236}">
+                <a16:creationId xmlns:a16="http://schemas.microsoft.com/office/drawing/2014/main" id="{B99B5C1E-67CF-74E9-E2F6-DF42550921E2}"/>
               </a:ext>
             </a:extLst>
           </p:cNvPr>
@@ -5448,8 +5528,8 @@
         </p:nvSpPr>
         <p:spPr>
           <a:xfrm>
-            <a:off x="7606515" y="3115496"/>
-            <a:ext cx="942586" cy="923889"/>
+            <a:off x="6179274" y="2954813"/>
+            <a:ext cx="1306584" cy="1124712"/>
           </a:xfrm>
           <a:prstGeom prst="ellipse">
             <a:avLst/>
@@ -5485,10 +5565,10 @@
       </p:sp>
       <p:sp>
         <p:nvSpPr>
-          <p:cNvPr id="7" name="Oval 6">
-            <a:extLst>
-              <a:ext uri="{FF2B5EF4-FFF2-40B4-BE49-F238E27FC236}">
-                <a16:creationId xmlns:a16="http://schemas.microsoft.com/office/drawing/2014/main" id="{F7B59CC0-B297-C455-D5EC-220979D7F80C}"/>
+          <p:cNvPr id="8" name="Oval 7">
+            <a:extLst>
+              <a:ext uri="{FF2B5EF4-FFF2-40B4-BE49-F238E27FC236}">
+                <a16:creationId xmlns:a16="http://schemas.microsoft.com/office/drawing/2014/main" id="{E91EE4CD-EF78-719A-1285-E6013110AF3D}"/>
               </a:ext>
             </a:extLst>
           </p:cNvPr>
@@ -5497,8 +5577,8 @@
         </p:nvSpPr>
         <p:spPr>
           <a:xfrm>
-            <a:off x="10856018" y="3132970"/>
-            <a:ext cx="1374349" cy="1093453"/>
+            <a:off x="10213848" y="2847041"/>
+            <a:ext cx="1953288" cy="1425077"/>
           </a:xfrm>
           <a:prstGeom prst="ellipse">
             <a:avLst/>
@@ -5526,14 +5606,14 @@
           <a:p>
             <a:pPr algn="ctr"/>
             <a:r>
-              <a:rPr lang="en-US" sz="1400" dirty="0"/>
+              <a:rPr lang="en-US" dirty="0"/>
               <a:t>LLM</a:t>
             </a:r>
           </a:p>
           <a:p>
             <a:pPr algn="ctr"/>
             <a:r>
-              <a:rPr lang="en-US" sz="1400" dirty="0"/>
+              <a:rPr lang="en-US" dirty="0"/>
               <a:t>(ChatGPT, etc.)</a:t>
             </a:r>
           </a:p>
@@ -5541,10 +5621,10 @@
       </p:sp>
       <p:sp>
         <p:nvSpPr>
-          <p:cNvPr id="12" name="Oval 11">
-            <a:extLst>
-              <a:ext uri="{FF2B5EF4-FFF2-40B4-BE49-F238E27FC236}">
-                <a16:creationId xmlns:a16="http://schemas.microsoft.com/office/drawing/2014/main" id="{9807FF28-4B1B-53E3-9EE0-63E9FB5D01C6}"/>
+          <p:cNvPr id="10" name="Rectangle 9">
+            <a:extLst>
+              <a:ext uri="{FF2B5EF4-FFF2-40B4-BE49-F238E27FC236}">
+                <a16:creationId xmlns:a16="http://schemas.microsoft.com/office/drawing/2014/main" id="{0EA13AEA-B2E7-D8AC-2AE5-A00324671240}"/>
               </a:ext>
             </a:extLst>
           </p:cNvPr>
@@ -5553,12 +5633,15 @@
         </p:nvSpPr>
         <p:spPr>
           <a:xfrm>
-            <a:off x="9226114" y="5182412"/>
-            <a:ext cx="1566672" cy="1100328"/>
-          </a:xfrm>
-          <a:prstGeom prst="ellipse">
+            <a:off x="9793246" y="5493547"/>
+            <a:ext cx="1754424" cy="798576"/>
+          </a:xfrm>
+          <a:prstGeom prst="rect">
             <a:avLst/>
           </a:prstGeom>
+          <a:solidFill>
+            <a:srgbClr val="C00000"/>
+          </a:solidFill>
         </p:spPr>
         <p:style>
           <a:lnRef idx="2">
@@ -5583,17 +5666,24 @@
             <a:pPr algn="ctr"/>
             <a:r>
               <a:rPr lang="en-US" dirty="0"/>
-              <a:t>Vector DB</a:t>
-            </a:r>
-          </a:p>
-        </p:txBody>
-      </p:sp>
-      <p:sp>
-        <p:nvSpPr>
-          <p:cNvPr id="14" name="Oval 13">
-            <a:extLst>
-              <a:ext uri="{FF2B5EF4-FFF2-40B4-BE49-F238E27FC236}">
-                <a16:creationId xmlns:a16="http://schemas.microsoft.com/office/drawing/2014/main" id="{B1145A95-2650-E039-D040-E588200972AC}"/>
+              <a:t>Private Data</a:t>
+            </a:r>
+          </a:p>
+          <a:p>
+            <a:pPr algn="ctr"/>
+            <a:r>
+              <a:rPr lang="en-US" dirty="0"/>
+              <a:t>PDF, DB, etc.</a:t>
+            </a:r>
+          </a:p>
+        </p:txBody>
+      </p:sp>
+      <p:sp>
+        <p:nvSpPr>
+          <p:cNvPr id="13" name="Oval 12">
+            <a:extLst>
+              <a:ext uri="{FF2B5EF4-FFF2-40B4-BE49-F238E27FC236}">
+                <a16:creationId xmlns:a16="http://schemas.microsoft.com/office/drawing/2014/main" id="{6CC59CDE-138D-9423-C3CF-11E714A642B4}"/>
               </a:ext>
             </a:extLst>
           </p:cNvPr>
@@ -5602,8 +5692,8 @@
         </p:nvSpPr>
         <p:spPr>
           <a:xfrm>
-            <a:off x="9120473" y="3147822"/>
-            <a:ext cx="1374349" cy="962184"/>
+            <a:off x="8081045" y="5667283"/>
+            <a:ext cx="1566672" cy="1100328"/>
           </a:xfrm>
           <a:prstGeom prst="ellipse">
             <a:avLst/>
@@ -5631,18 +5721,18 @@
           <a:p>
             <a:pPr algn="ctr"/>
             <a:r>
-              <a:rPr lang="en-US" sz="1600" dirty="0"/>
-              <a:t>Retriever</a:t>
-            </a:r>
-          </a:p>
-        </p:txBody>
-      </p:sp>
-      <p:sp>
-        <p:nvSpPr>
-          <p:cNvPr id="16" name="Arrow: Right 15">
-            <a:extLst>
-              <a:ext uri="{FF2B5EF4-FFF2-40B4-BE49-F238E27FC236}">
-                <a16:creationId xmlns:a16="http://schemas.microsoft.com/office/drawing/2014/main" id="{04C410C1-EC8E-3625-F39D-BE86687EC53C}"/>
+              <a:rPr lang="en-US" dirty="0"/>
+              <a:t>Vector DB</a:t>
+            </a:r>
+          </a:p>
+        </p:txBody>
+      </p:sp>
+      <p:sp>
+        <p:nvSpPr>
+          <p:cNvPr id="17" name="Oval 16">
+            <a:extLst>
+              <a:ext uri="{FF2B5EF4-FFF2-40B4-BE49-F238E27FC236}">
+                <a16:creationId xmlns:a16="http://schemas.microsoft.com/office/drawing/2014/main" id="{798A7A22-89F5-429F-D286-1D265095C231}"/>
               </a:ext>
             </a:extLst>
           </p:cNvPr>
@@ -5651,10 +5741,10 @@
         </p:nvSpPr>
         <p:spPr>
           <a:xfrm>
-            <a:off x="8569241" y="3307693"/>
-            <a:ext cx="579360" cy="539496"/>
-          </a:xfrm>
-          <a:prstGeom prst="rightArrow">
+            <a:off x="8081045" y="3891897"/>
+            <a:ext cx="1479351" cy="962184"/>
+          </a:xfrm>
+          <a:prstGeom prst="ellipse">
             <a:avLst/>
           </a:prstGeom>
         </p:spPr>
@@ -5679,16 +5769,19 @@
           <a:lstStyle/>
           <a:p>
             <a:pPr algn="ctr"/>
-            <a:endParaRPr lang="en-US"/>
-          </a:p>
-        </p:txBody>
-      </p:sp>
-      <p:sp>
-        <p:nvSpPr>
-          <p:cNvPr id="18" name="Arrow: Right 17">
-            <a:extLst>
-              <a:ext uri="{FF2B5EF4-FFF2-40B4-BE49-F238E27FC236}">
-                <a16:creationId xmlns:a16="http://schemas.microsoft.com/office/drawing/2014/main" id="{4882CCF1-D883-2ECC-F7D4-0661D479C0A1}"/>
+            <a:r>
+              <a:rPr lang="en-US" dirty="0"/>
+              <a:t>Retriever</a:t>
+            </a:r>
+          </a:p>
+        </p:txBody>
+      </p:sp>
+      <p:sp>
+        <p:nvSpPr>
+          <p:cNvPr id="21" name="Arrow: Right 20">
+            <a:extLst>
+              <a:ext uri="{FF2B5EF4-FFF2-40B4-BE49-F238E27FC236}">
+                <a16:creationId xmlns:a16="http://schemas.microsoft.com/office/drawing/2014/main" id="{D48FC858-E459-8BCE-05EB-92BFE8AD41B5}"/>
               </a:ext>
             </a:extLst>
           </p:cNvPr>
@@ -5696,9 +5789,9 @@
           <p:nvPr/>
         </p:nvSpPr>
         <p:spPr>
-          <a:xfrm>
-            <a:off x="10514962" y="3416658"/>
-            <a:ext cx="441779" cy="539496"/>
+          <a:xfrm rot="2308375">
+            <a:off x="7404496" y="3789935"/>
+            <a:ext cx="579360" cy="539496"/>
           </a:xfrm>
           <a:prstGeom prst="rightArrow">
             <a:avLst/>
@@ -5731,10 +5824,10 @@
       </p:sp>
       <p:sp>
         <p:nvSpPr>
-          <p:cNvPr id="20" name="Arrow: Right 19">
-            <a:extLst>
-              <a:ext uri="{FF2B5EF4-FFF2-40B4-BE49-F238E27FC236}">
-                <a16:creationId xmlns:a16="http://schemas.microsoft.com/office/drawing/2014/main" id="{D3FDEEF5-0059-8B30-9D1A-39045CEAB8E3}"/>
+          <p:cNvPr id="25" name="Arrow: Right 24">
+            <a:extLst>
+              <a:ext uri="{FF2B5EF4-FFF2-40B4-BE49-F238E27FC236}">
+                <a16:creationId xmlns:a16="http://schemas.microsoft.com/office/drawing/2014/main" id="{F8FD8B12-0D01-1756-BF2D-9A806FE74D0C}"/>
               </a:ext>
             </a:extLst>
           </p:cNvPr>
@@ -5742,9 +5835,9 @@
           <p:nvPr/>
         </p:nvSpPr>
         <p:spPr>
-          <a:xfrm rot="5400000">
-            <a:off x="9278615" y="4308973"/>
-            <a:ext cx="704596" cy="539496"/>
+          <a:xfrm rot="19171423">
+            <a:off x="9552414" y="3740760"/>
+            <a:ext cx="669418" cy="539496"/>
           </a:xfrm>
           <a:prstGeom prst="rightArrow">
             <a:avLst/>
@@ -5777,10 +5870,10 @@
       </p:sp>
       <p:sp>
         <p:nvSpPr>
-          <p:cNvPr id="22" name="Arrow: Right 21">
-            <a:extLst>
-              <a:ext uri="{FF2B5EF4-FFF2-40B4-BE49-F238E27FC236}">
-                <a16:creationId xmlns:a16="http://schemas.microsoft.com/office/drawing/2014/main" id="{0588ADEA-46AB-7E40-F5F0-3D30837AB2CA}"/>
+          <p:cNvPr id="27" name="Arrow: Right 26">
+            <a:extLst>
+              <a:ext uri="{FF2B5EF4-FFF2-40B4-BE49-F238E27FC236}">
+                <a16:creationId xmlns:a16="http://schemas.microsoft.com/office/drawing/2014/main" id="{05F18C5B-519E-EFD6-5D15-0B5F45343189}"/>
               </a:ext>
             </a:extLst>
           </p:cNvPr>
@@ -5788,9 +5881,9 @@
           <p:nvPr/>
         </p:nvSpPr>
         <p:spPr>
-          <a:xfrm rot="10800000">
-            <a:off x="9070868" y="2688262"/>
-            <a:ext cx="1549887" cy="539496"/>
+          <a:xfrm rot="5400000">
+            <a:off x="8197602" y="4955191"/>
+            <a:ext cx="704596" cy="539496"/>
           </a:xfrm>
           <a:prstGeom prst="rightArrow">
             <a:avLst/>
@@ -5823,10 +5916,10 @@
       </p:sp>
       <p:sp>
         <p:nvSpPr>
-          <p:cNvPr id="24" name="Arrow: Right 23">
-            <a:extLst>
-              <a:ext uri="{FF2B5EF4-FFF2-40B4-BE49-F238E27FC236}">
-                <a16:creationId xmlns:a16="http://schemas.microsoft.com/office/drawing/2014/main" id="{C53C13AC-137A-B2B9-2AE0-C2C5A8AAE2BF}"/>
+          <p:cNvPr id="29" name="Arrow: Right 28">
+            <a:extLst>
+              <a:ext uri="{FF2B5EF4-FFF2-40B4-BE49-F238E27FC236}">
+                <a16:creationId xmlns:a16="http://schemas.microsoft.com/office/drawing/2014/main" id="{67CA65A4-F3BA-FF04-0EB2-16FDFF236871}"/>
               </a:ext>
             </a:extLst>
           </p:cNvPr>
@@ -5834,9 +5927,9 @@
           <p:nvPr/>
         </p:nvSpPr>
         <p:spPr>
-          <a:xfrm rot="16200000">
-            <a:off x="9998709" y="4338554"/>
-            <a:ext cx="704596" cy="539496"/>
+          <a:xfrm rot="10800000">
+            <a:off x="7508510" y="2946535"/>
+            <a:ext cx="2711742" cy="539496"/>
           </a:xfrm>
           <a:prstGeom prst="rightArrow">
             <a:avLst/>
@@ -5867,6 +5960,262 @@
           </a:p>
         </p:txBody>
       </p:sp>
+      <p:sp>
+        <p:nvSpPr>
+          <p:cNvPr id="31" name="TextBox 30">
+            <a:extLst>
+              <a:ext uri="{FF2B5EF4-FFF2-40B4-BE49-F238E27FC236}">
+                <a16:creationId xmlns:a16="http://schemas.microsoft.com/office/drawing/2014/main" id="{A4AF4052-8BA8-D56A-D2F9-C5B7B2D9F876}"/>
+              </a:ext>
+            </a:extLst>
+          </p:cNvPr>
+          <p:cNvSpPr txBox="1"/>
+          <p:nvPr/>
+        </p:nvSpPr>
+        <p:spPr>
+          <a:xfrm>
+            <a:off x="7177598" y="4119426"/>
+            <a:ext cx="367408" cy="523220"/>
+          </a:xfrm>
+          <a:prstGeom prst="rect">
+            <a:avLst/>
+          </a:prstGeom>
+          <a:noFill/>
+        </p:spPr>
+        <p:txBody>
+          <a:bodyPr wrap="square" rtlCol="0">
+            <a:spAutoFit/>
+          </a:bodyPr>
+          <a:lstStyle/>
+          <a:p>
+            <a:r>
+              <a:rPr lang="en-US" sz="2800" b="1" dirty="0">
+                <a:solidFill>
+                  <a:schemeClr val="accent6">
+                    <a:lumMod val="60000"/>
+                    <a:lumOff val="40000"/>
+                  </a:schemeClr>
+                </a:solidFill>
+              </a:rPr>
+              <a:t>1</a:t>
+            </a:r>
+          </a:p>
+        </p:txBody>
+      </p:sp>
+      <p:sp>
+        <p:nvSpPr>
+          <p:cNvPr id="34" name="TextBox 33">
+            <a:extLst>
+              <a:ext uri="{FF2B5EF4-FFF2-40B4-BE49-F238E27FC236}">
+                <a16:creationId xmlns:a16="http://schemas.microsoft.com/office/drawing/2014/main" id="{1EB148F3-EABF-F272-6428-E49A1FD768D6}"/>
+              </a:ext>
+            </a:extLst>
+          </p:cNvPr>
+          <p:cNvSpPr txBox="1"/>
+          <p:nvPr/>
+        </p:nvSpPr>
+        <p:spPr>
+          <a:xfrm>
+            <a:off x="7765966" y="5253791"/>
+            <a:ext cx="367408" cy="523220"/>
+          </a:xfrm>
+          <a:prstGeom prst="rect">
+            <a:avLst/>
+          </a:prstGeom>
+          <a:noFill/>
+        </p:spPr>
+        <p:txBody>
+          <a:bodyPr wrap="square" rtlCol="0">
+            <a:spAutoFit/>
+          </a:bodyPr>
+          <a:lstStyle/>
+          <a:p>
+            <a:r>
+              <a:rPr lang="en-US" sz="2800" b="1" dirty="0">
+                <a:solidFill>
+                  <a:schemeClr val="accent6">
+                    <a:lumMod val="60000"/>
+                    <a:lumOff val="40000"/>
+                  </a:schemeClr>
+                </a:solidFill>
+              </a:rPr>
+              <a:t>2</a:t>
+            </a:r>
+          </a:p>
+        </p:txBody>
+      </p:sp>
+      <p:sp>
+        <p:nvSpPr>
+          <p:cNvPr id="36" name="TextBox 35">
+            <a:extLst>
+              <a:ext uri="{FF2B5EF4-FFF2-40B4-BE49-F238E27FC236}">
+                <a16:creationId xmlns:a16="http://schemas.microsoft.com/office/drawing/2014/main" id="{DC286B61-9E98-C4A2-75EF-E37AC7393641}"/>
+              </a:ext>
+            </a:extLst>
+          </p:cNvPr>
+          <p:cNvSpPr txBox="1"/>
+          <p:nvPr/>
+        </p:nvSpPr>
+        <p:spPr>
+          <a:xfrm>
+            <a:off x="9800992" y="4208053"/>
+            <a:ext cx="367408" cy="523220"/>
+          </a:xfrm>
+          <a:prstGeom prst="rect">
+            <a:avLst/>
+          </a:prstGeom>
+          <a:noFill/>
+        </p:spPr>
+        <p:txBody>
+          <a:bodyPr wrap="square" rtlCol="0">
+            <a:spAutoFit/>
+          </a:bodyPr>
+          <a:lstStyle/>
+          <a:p>
+            <a:r>
+              <a:rPr lang="en-US" sz="2800" b="1" dirty="0">
+                <a:solidFill>
+                  <a:schemeClr val="accent6">
+                    <a:lumMod val="60000"/>
+                    <a:lumOff val="40000"/>
+                  </a:schemeClr>
+                </a:solidFill>
+              </a:rPr>
+              <a:t>4</a:t>
+            </a:r>
+          </a:p>
+        </p:txBody>
+      </p:sp>
+      <p:sp>
+        <p:nvSpPr>
+          <p:cNvPr id="38" name="TextBox 37">
+            <a:extLst>
+              <a:ext uri="{FF2B5EF4-FFF2-40B4-BE49-F238E27FC236}">
+                <a16:creationId xmlns:a16="http://schemas.microsoft.com/office/drawing/2014/main" id="{490275A1-03D0-D813-3939-03F1BD2FA5C5}"/>
+              </a:ext>
+            </a:extLst>
+          </p:cNvPr>
+          <p:cNvSpPr txBox="1"/>
+          <p:nvPr/>
+        </p:nvSpPr>
+        <p:spPr>
+          <a:xfrm>
+            <a:off x="8635944" y="2675645"/>
+            <a:ext cx="367408" cy="523220"/>
+          </a:xfrm>
+          <a:prstGeom prst="rect">
+            <a:avLst/>
+          </a:prstGeom>
+          <a:noFill/>
+        </p:spPr>
+        <p:txBody>
+          <a:bodyPr wrap="square" rtlCol="0">
+            <a:spAutoFit/>
+          </a:bodyPr>
+          <a:lstStyle/>
+          <a:p>
+            <a:r>
+              <a:rPr lang="en-US" sz="2800" b="1" dirty="0">
+                <a:solidFill>
+                  <a:schemeClr val="accent6">
+                    <a:lumMod val="60000"/>
+                    <a:lumOff val="40000"/>
+                  </a:schemeClr>
+                </a:solidFill>
+              </a:rPr>
+              <a:t>5</a:t>
+            </a:r>
+          </a:p>
+        </p:txBody>
+      </p:sp>
+      <p:sp>
+        <p:nvSpPr>
+          <p:cNvPr id="40" name="Arrow: Right 39">
+            <a:extLst>
+              <a:ext uri="{FF2B5EF4-FFF2-40B4-BE49-F238E27FC236}">
+                <a16:creationId xmlns:a16="http://schemas.microsoft.com/office/drawing/2014/main" id="{B92ABA76-F2DF-F7CD-EEB9-F312845846B4}"/>
+              </a:ext>
+            </a:extLst>
+          </p:cNvPr>
+          <p:cNvSpPr/>
+          <p:nvPr/>
+        </p:nvSpPr>
+        <p:spPr>
+          <a:xfrm rot="16200000">
+            <a:off x="8704276" y="4893355"/>
+            <a:ext cx="704596" cy="539496"/>
+          </a:xfrm>
+          <a:prstGeom prst="rightArrow">
+            <a:avLst/>
+          </a:prstGeom>
+        </p:spPr>
+        <p:style>
+          <a:lnRef idx="2">
+            <a:schemeClr val="accent1">
+              <a:shade val="15000"/>
+            </a:schemeClr>
+          </a:lnRef>
+          <a:fillRef idx="1">
+            <a:schemeClr val="accent1"/>
+          </a:fillRef>
+          <a:effectRef idx="0">
+            <a:schemeClr val="accent1"/>
+          </a:effectRef>
+          <a:fontRef idx="minor">
+            <a:schemeClr val="lt1"/>
+          </a:fontRef>
+        </p:style>
+        <p:txBody>
+          <a:bodyPr rtlCol="0" anchor="ctr"/>
+          <a:lstStyle/>
+          <a:p>
+            <a:pPr algn="ctr"/>
+            <a:endParaRPr lang="en-US"/>
+          </a:p>
+        </p:txBody>
+      </p:sp>
+      <p:sp>
+        <p:nvSpPr>
+          <p:cNvPr id="42" name="TextBox 41">
+            <a:extLst>
+              <a:ext uri="{FF2B5EF4-FFF2-40B4-BE49-F238E27FC236}">
+                <a16:creationId xmlns:a16="http://schemas.microsoft.com/office/drawing/2014/main" id="{7365773C-66CE-AAD3-68A1-0831889E4322}"/>
+              </a:ext>
+            </a:extLst>
+          </p:cNvPr>
+          <p:cNvSpPr txBox="1"/>
+          <p:nvPr/>
+        </p:nvSpPr>
+        <p:spPr>
+          <a:xfrm>
+            <a:off x="9230401" y="5089199"/>
+            <a:ext cx="367408" cy="523220"/>
+          </a:xfrm>
+          <a:prstGeom prst="rect">
+            <a:avLst/>
+          </a:prstGeom>
+          <a:noFill/>
+        </p:spPr>
+        <p:txBody>
+          <a:bodyPr wrap="square" rtlCol="0">
+            <a:spAutoFit/>
+          </a:bodyPr>
+          <a:lstStyle/>
+          <a:p>
+            <a:r>
+              <a:rPr lang="en-US" sz="2800" b="1" dirty="0">
+                <a:solidFill>
+                  <a:schemeClr val="accent6">
+                    <a:lumMod val="60000"/>
+                    <a:lumOff val="40000"/>
+                  </a:schemeClr>
+                </a:solidFill>
+              </a:rPr>
+              <a:t>3</a:t>
+            </a:r>
+          </a:p>
+        </p:txBody>
+      </p:sp>
     </p:spTree>
     <p:extLst>
       <p:ext uri="{BB962C8B-B14F-4D97-AF65-F5344CB8AC3E}">
@@ -5881,6 +6230,1026 @@
 </file>
 
 <file path=ppt/slides/slide4.xml><?xml version="1.0" encoding="utf-8"?>
+<p:sld xmlns:a="http://schemas.openxmlformats.org/drawingml/2006/main" xmlns:r="http://schemas.openxmlformats.org/officeDocument/2006/relationships" xmlns:p="http://schemas.openxmlformats.org/presentationml/2006/main">
+  <p:cSld>
+    <p:spTree>
+      <p:nvGrpSpPr>
+        <p:cNvPr id="1" name="">
+          <a:extLst>
+            <a:ext uri="{FF2B5EF4-FFF2-40B4-BE49-F238E27FC236}">
+              <a16:creationId xmlns:a16="http://schemas.microsoft.com/office/drawing/2014/main" id="{EAFB377D-D124-C33C-CEEC-5DFBE962F648}"/>
+            </a:ext>
+          </a:extLst>
+        </p:cNvPr>
+        <p:cNvGrpSpPr/>
+        <p:nvPr/>
+      </p:nvGrpSpPr>
+      <p:grpSpPr>
+        <a:xfrm>
+          <a:off x="0" y="0"/>
+          <a:ext cx="0" cy="0"/>
+          <a:chOff x="0" y="0"/>
+          <a:chExt cx="0" cy="0"/>
+        </a:xfrm>
+      </p:grpSpPr>
+      <p:sp>
+        <p:nvSpPr>
+          <p:cNvPr id="3" name="TextBox 2">
+            <a:extLst>
+              <a:ext uri="{FF2B5EF4-FFF2-40B4-BE49-F238E27FC236}">
+                <a16:creationId xmlns:a16="http://schemas.microsoft.com/office/drawing/2014/main" id="{DAEB9F7E-B6A8-51F0-4A16-6E289153F76D}"/>
+              </a:ext>
+            </a:extLst>
+          </p:cNvPr>
+          <p:cNvSpPr txBox="1"/>
+          <p:nvPr/>
+        </p:nvSpPr>
+        <p:spPr>
+          <a:xfrm>
+            <a:off x="150039" y="90389"/>
+            <a:ext cx="8623064" cy="2708434"/>
+          </a:xfrm>
+          <a:prstGeom prst="rect">
+            <a:avLst/>
+          </a:prstGeom>
+          <a:noFill/>
+        </p:spPr>
+        <p:txBody>
+          <a:bodyPr wrap="square">
+            <a:spAutoFit/>
+          </a:bodyPr>
+          <a:lstStyle/>
+          <a:p>
+            <a:pPr marR="0" lvl="0">
+              <a:spcBef>
+                <a:spcPts val="900"/>
+              </a:spcBef>
+              <a:spcAft>
+                <a:spcPts val="900"/>
+              </a:spcAft>
+            </a:pPr>
+            <a:r>
+              <a:rPr lang="en-US" sz="2000" b="1" u="none" strike="noStrike" dirty="0">
+                <a:solidFill>
+                  <a:schemeClr val="accent6">
+                    <a:lumMod val="60000"/>
+                    <a:lumOff val="40000"/>
+                  </a:schemeClr>
+                </a:solidFill>
+                <a:effectLst/>
+                <a:latin typeface="+mn-lt"/>
+              </a:rPr>
+              <a:t>…</a:t>
+            </a:r>
+            <a:r>
+              <a:rPr lang="en-US" sz="2000" b="1" u="none" strike="noStrike" dirty="0" err="1">
+                <a:solidFill>
+                  <a:schemeClr val="accent6">
+                    <a:lumMod val="60000"/>
+                    <a:lumOff val="40000"/>
+                  </a:schemeClr>
+                </a:solidFill>
+                <a:effectLst/>
+                <a:latin typeface="+mn-lt"/>
+              </a:rPr>
+              <a:t>cont</a:t>
+            </a:r>
+            <a:endParaRPr lang="en-US" sz="2000" b="1" u="none" strike="noStrike" dirty="0">
+              <a:solidFill>
+                <a:schemeClr val="accent6">
+                  <a:lumMod val="60000"/>
+                  <a:lumOff val="40000"/>
+                </a:schemeClr>
+              </a:solidFill>
+              <a:effectLst/>
+              <a:latin typeface="+mn-lt"/>
+            </a:endParaRPr>
+          </a:p>
+          <a:p>
+            <a:pPr marR="0" lvl="0">
+              <a:spcBef>
+                <a:spcPts val="900"/>
+              </a:spcBef>
+              <a:spcAft>
+                <a:spcPts val="900"/>
+              </a:spcAft>
+            </a:pPr>
+            <a:r>
+              <a:rPr lang="en-US" sz="2000" b="1" u="none" strike="noStrike" dirty="0">
+                <a:solidFill>
+                  <a:schemeClr val="accent6">
+                    <a:lumMod val="60000"/>
+                    <a:lumOff val="40000"/>
+                  </a:schemeClr>
+                </a:solidFill>
+                <a:effectLst/>
+                <a:latin typeface="+mn-lt"/>
+              </a:rPr>
+              <a:t>2. Retrieval:</a:t>
+            </a:r>
+            <a:r>
+              <a:rPr lang="en-US" sz="2000" b="0" u="none" strike="noStrike" dirty="0">
+                <a:solidFill>
+                  <a:schemeClr val="accent6">
+                    <a:lumMod val="60000"/>
+                    <a:lumOff val="40000"/>
+                  </a:schemeClr>
+                </a:solidFill>
+                <a:effectLst/>
+                <a:latin typeface="+mn-lt"/>
+              </a:rPr>
+              <a:t> It searches the vector database for text blocks matching that vector. It pulls a messy mix of Q2 financial spreadsheets, competitor analysis folders, and marketing strategy presentations.</a:t>
+            </a:r>
+          </a:p>
+          <a:p>
+            <a:pPr marR="0" lvl="0">
+              <a:spcBef>
+                <a:spcPts val="900"/>
+              </a:spcBef>
+              <a:spcAft>
+                <a:spcPts val="900"/>
+              </a:spcAft>
+            </a:pPr>
+            <a:r>
+              <a:rPr lang="en-US" sz="2000" b="1" u="none" strike="noStrike" dirty="0">
+                <a:solidFill>
+                  <a:schemeClr val="accent6">
+                    <a:lumMod val="60000"/>
+                    <a:lumOff val="40000"/>
+                  </a:schemeClr>
+                </a:solidFill>
+                <a:effectLst/>
+                <a:latin typeface="+mn-lt"/>
+              </a:rPr>
+              <a:t>The Bottleneck:</a:t>
+            </a:r>
+            <a:r>
+              <a:rPr lang="en-US" sz="2000" b="0" u="none" strike="noStrike" dirty="0">
+                <a:solidFill>
+                  <a:schemeClr val="accent6">
+                    <a:lumMod val="60000"/>
+                    <a:lumOff val="40000"/>
+                  </a:schemeClr>
+                </a:solidFill>
+                <a:effectLst/>
+                <a:latin typeface="+mn-lt"/>
+              </a:rPr>
+              <a:t> Because it does only one search, the top 5 retrieved chunks might contain our Q2 revenue numbers, but completely miss the competitor's data or the specific marketing strategy insights.</a:t>
+            </a:r>
+          </a:p>
+        </p:txBody>
+      </p:sp>
+      <p:sp>
+        <p:nvSpPr>
+          <p:cNvPr id="4" name="Oval 3">
+            <a:extLst>
+              <a:ext uri="{FF2B5EF4-FFF2-40B4-BE49-F238E27FC236}">
+                <a16:creationId xmlns:a16="http://schemas.microsoft.com/office/drawing/2014/main" id="{FBB5073B-5109-8DC9-AEB9-B35D2BBC4960}"/>
+              </a:ext>
+            </a:extLst>
+          </p:cNvPr>
+          <p:cNvSpPr/>
+          <p:nvPr/>
+        </p:nvSpPr>
+        <p:spPr>
+          <a:xfrm>
+            <a:off x="6179274" y="2954813"/>
+            <a:ext cx="1306584" cy="1124712"/>
+          </a:xfrm>
+          <a:prstGeom prst="ellipse">
+            <a:avLst/>
+          </a:prstGeom>
+        </p:spPr>
+        <p:style>
+          <a:lnRef idx="2">
+            <a:schemeClr val="accent1">
+              <a:shade val="15000"/>
+            </a:schemeClr>
+          </a:lnRef>
+          <a:fillRef idx="1">
+            <a:schemeClr val="accent1"/>
+          </a:fillRef>
+          <a:effectRef idx="0">
+            <a:schemeClr val="accent1"/>
+          </a:effectRef>
+          <a:fontRef idx="minor">
+            <a:schemeClr val="lt1"/>
+          </a:fontRef>
+        </p:style>
+        <p:txBody>
+          <a:bodyPr rtlCol="0" anchor="ctr"/>
+          <a:lstStyle/>
+          <a:p>
+            <a:pPr algn="ctr"/>
+            <a:r>
+              <a:rPr lang="en-US" dirty="0"/>
+              <a:t>User</a:t>
+            </a:r>
+          </a:p>
+        </p:txBody>
+      </p:sp>
+      <p:sp>
+        <p:nvSpPr>
+          <p:cNvPr id="8" name="Oval 7">
+            <a:extLst>
+              <a:ext uri="{FF2B5EF4-FFF2-40B4-BE49-F238E27FC236}">
+                <a16:creationId xmlns:a16="http://schemas.microsoft.com/office/drawing/2014/main" id="{95A71BB5-8C1F-1EBC-870F-4A66E5C58A7E}"/>
+              </a:ext>
+            </a:extLst>
+          </p:cNvPr>
+          <p:cNvSpPr/>
+          <p:nvPr/>
+        </p:nvSpPr>
+        <p:spPr>
+          <a:xfrm>
+            <a:off x="10213848" y="2847041"/>
+            <a:ext cx="1953288" cy="1425077"/>
+          </a:xfrm>
+          <a:prstGeom prst="ellipse">
+            <a:avLst/>
+          </a:prstGeom>
+        </p:spPr>
+        <p:style>
+          <a:lnRef idx="2">
+            <a:schemeClr val="accent1">
+              <a:shade val="15000"/>
+            </a:schemeClr>
+          </a:lnRef>
+          <a:fillRef idx="1">
+            <a:schemeClr val="accent1"/>
+          </a:fillRef>
+          <a:effectRef idx="0">
+            <a:schemeClr val="accent1"/>
+          </a:effectRef>
+          <a:fontRef idx="minor">
+            <a:schemeClr val="lt1"/>
+          </a:fontRef>
+        </p:style>
+        <p:txBody>
+          <a:bodyPr rtlCol="0" anchor="ctr"/>
+          <a:lstStyle/>
+          <a:p>
+            <a:pPr algn="ctr"/>
+            <a:r>
+              <a:rPr lang="en-US" dirty="0"/>
+              <a:t>LLM</a:t>
+            </a:r>
+          </a:p>
+          <a:p>
+            <a:pPr algn="ctr"/>
+            <a:r>
+              <a:rPr lang="en-US" dirty="0"/>
+              <a:t>(ChatGPT, etc.)</a:t>
+            </a:r>
+          </a:p>
+        </p:txBody>
+      </p:sp>
+      <p:sp>
+        <p:nvSpPr>
+          <p:cNvPr id="10" name="Rectangle 9">
+            <a:extLst>
+              <a:ext uri="{FF2B5EF4-FFF2-40B4-BE49-F238E27FC236}">
+                <a16:creationId xmlns:a16="http://schemas.microsoft.com/office/drawing/2014/main" id="{48690FDE-4177-1D8B-6E9B-06FD92965DC4}"/>
+              </a:ext>
+            </a:extLst>
+          </p:cNvPr>
+          <p:cNvSpPr/>
+          <p:nvPr/>
+        </p:nvSpPr>
+        <p:spPr>
+          <a:xfrm>
+            <a:off x="9793246" y="5493547"/>
+            <a:ext cx="1754424" cy="798576"/>
+          </a:xfrm>
+          <a:prstGeom prst="rect">
+            <a:avLst/>
+          </a:prstGeom>
+          <a:solidFill>
+            <a:srgbClr val="C00000"/>
+          </a:solidFill>
+        </p:spPr>
+        <p:style>
+          <a:lnRef idx="2">
+            <a:schemeClr val="accent1">
+              <a:shade val="15000"/>
+            </a:schemeClr>
+          </a:lnRef>
+          <a:fillRef idx="1">
+            <a:schemeClr val="accent1"/>
+          </a:fillRef>
+          <a:effectRef idx="0">
+            <a:schemeClr val="accent1"/>
+          </a:effectRef>
+          <a:fontRef idx="minor">
+            <a:schemeClr val="lt1"/>
+          </a:fontRef>
+        </p:style>
+        <p:txBody>
+          <a:bodyPr rtlCol="0" anchor="ctr"/>
+          <a:lstStyle/>
+          <a:p>
+            <a:pPr algn="ctr"/>
+            <a:r>
+              <a:rPr lang="en-US" dirty="0"/>
+              <a:t>Private Data</a:t>
+            </a:r>
+          </a:p>
+          <a:p>
+            <a:pPr algn="ctr"/>
+            <a:r>
+              <a:rPr lang="en-US" dirty="0"/>
+              <a:t>PDF, DB, etc.</a:t>
+            </a:r>
+          </a:p>
+        </p:txBody>
+      </p:sp>
+      <p:sp>
+        <p:nvSpPr>
+          <p:cNvPr id="13" name="Oval 12">
+            <a:extLst>
+              <a:ext uri="{FF2B5EF4-FFF2-40B4-BE49-F238E27FC236}">
+                <a16:creationId xmlns:a16="http://schemas.microsoft.com/office/drawing/2014/main" id="{9BC6FD9F-B6E2-2FA9-04E9-D89F5C7905A3}"/>
+              </a:ext>
+            </a:extLst>
+          </p:cNvPr>
+          <p:cNvSpPr/>
+          <p:nvPr/>
+        </p:nvSpPr>
+        <p:spPr>
+          <a:xfrm>
+            <a:off x="8081045" y="5667283"/>
+            <a:ext cx="1566672" cy="1100328"/>
+          </a:xfrm>
+          <a:prstGeom prst="ellipse">
+            <a:avLst/>
+          </a:prstGeom>
+        </p:spPr>
+        <p:style>
+          <a:lnRef idx="2">
+            <a:schemeClr val="accent1">
+              <a:shade val="15000"/>
+            </a:schemeClr>
+          </a:lnRef>
+          <a:fillRef idx="1">
+            <a:schemeClr val="accent1"/>
+          </a:fillRef>
+          <a:effectRef idx="0">
+            <a:schemeClr val="accent1"/>
+          </a:effectRef>
+          <a:fontRef idx="minor">
+            <a:schemeClr val="lt1"/>
+          </a:fontRef>
+        </p:style>
+        <p:txBody>
+          <a:bodyPr rtlCol="0" anchor="ctr"/>
+          <a:lstStyle/>
+          <a:p>
+            <a:pPr algn="ctr"/>
+            <a:r>
+              <a:rPr lang="en-US" dirty="0"/>
+              <a:t>Vector DB</a:t>
+            </a:r>
+          </a:p>
+        </p:txBody>
+      </p:sp>
+      <p:sp>
+        <p:nvSpPr>
+          <p:cNvPr id="17" name="Oval 16">
+            <a:extLst>
+              <a:ext uri="{FF2B5EF4-FFF2-40B4-BE49-F238E27FC236}">
+                <a16:creationId xmlns:a16="http://schemas.microsoft.com/office/drawing/2014/main" id="{028BBB17-4FCF-1014-7468-194FBE3D1C17}"/>
+              </a:ext>
+            </a:extLst>
+          </p:cNvPr>
+          <p:cNvSpPr/>
+          <p:nvPr/>
+        </p:nvSpPr>
+        <p:spPr>
+          <a:xfrm>
+            <a:off x="8081045" y="3891897"/>
+            <a:ext cx="1479351" cy="962184"/>
+          </a:xfrm>
+          <a:prstGeom prst="ellipse">
+            <a:avLst/>
+          </a:prstGeom>
+        </p:spPr>
+        <p:style>
+          <a:lnRef idx="2">
+            <a:schemeClr val="accent1">
+              <a:shade val="15000"/>
+            </a:schemeClr>
+          </a:lnRef>
+          <a:fillRef idx="1">
+            <a:schemeClr val="accent1"/>
+          </a:fillRef>
+          <a:effectRef idx="0">
+            <a:schemeClr val="accent1"/>
+          </a:effectRef>
+          <a:fontRef idx="minor">
+            <a:schemeClr val="lt1"/>
+          </a:fontRef>
+        </p:style>
+        <p:txBody>
+          <a:bodyPr rtlCol="0" anchor="ctr"/>
+          <a:lstStyle/>
+          <a:p>
+            <a:pPr algn="ctr"/>
+            <a:r>
+              <a:rPr lang="en-US" dirty="0"/>
+              <a:t>Retriever</a:t>
+            </a:r>
+          </a:p>
+        </p:txBody>
+      </p:sp>
+      <p:sp>
+        <p:nvSpPr>
+          <p:cNvPr id="21" name="Arrow: Right 20">
+            <a:extLst>
+              <a:ext uri="{FF2B5EF4-FFF2-40B4-BE49-F238E27FC236}">
+                <a16:creationId xmlns:a16="http://schemas.microsoft.com/office/drawing/2014/main" id="{599A1AD6-9625-BEC6-D083-5A8581AF55EB}"/>
+              </a:ext>
+            </a:extLst>
+          </p:cNvPr>
+          <p:cNvSpPr/>
+          <p:nvPr/>
+        </p:nvSpPr>
+        <p:spPr>
+          <a:xfrm rot="2308375">
+            <a:off x="7404496" y="3789935"/>
+            <a:ext cx="579360" cy="539496"/>
+          </a:xfrm>
+          <a:prstGeom prst="rightArrow">
+            <a:avLst/>
+          </a:prstGeom>
+        </p:spPr>
+        <p:style>
+          <a:lnRef idx="2">
+            <a:schemeClr val="accent1">
+              <a:shade val="15000"/>
+            </a:schemeClr>
+          </a:lnRef>
+          <a:fillRef idx="1">
+            <a:schemeClr val="accent1"/>
+          </a:fillRef>
+          <a:effectRef idx="0">
+            <a:schemeClr val="accent1"/>
+          </a:effectRef>
+          <a:fontRef idx="minor">
+            <a:schemeClr val="lt1"/>
+          </a:fontRef>
+        </p:style>
+        <p:txBody>
+          <a:bodyPr rtlCol="0" anchor="ctr"/>
+          <a:lstStyle/>
+          <a:p>
+            <a:pPr algn="ctr"/>
+            <a:endParaRPr lang="en-US"/>
+          </a:p>
+        </p:txBody>
+      </p:sp>
+      <p:sp>
+        <p:nvSpPr>
+          <p:cNvPr id="25" name="Arrow: Right 24">
+            <a:extLst>
+              <a:ext uri="{FF2B5EF4-FFF2-40B4-BE49-F238E27FC236}">
+                <a16:creationId xmlns:a16="http://schemas.microsoft.com/office/drawing/2014/main" id="{EFB60676-476E-FFC2-0557-DD64D303CEDD}"/>
+              </a:ext>
+            </a:extLst>
+          </p:cNvPr>
+          <p:cNvSpPr/>
+          <p:nvPr/>
+        </p:nvSpPr>
+        <p:spPr>
+          <a:xfrm rot="19171423">
+            <a:off x="9552414" y="3740760"/>
+            <a:ext cx="669418" cy="539496"/>
+          </a:xfrm>
+          <a:prstGeom prst="rightArrow">
+            <a:avLst/>
+          </a:prstGeom>
+        </p:spPr>
+        <p:style>
+          <a:lnRef idx="2">
+            <a:schemeClr val="accent1">
+              <a:shade val="15000"/>
+            </a:schemeClr>
+          </a:lnRef>
+          <a:fillRef idx="1">
+            <a:schemeClr val="accent1"/>
+          </a:fillRef>
+          <a:effectRef idx="0">
+            <a:schemeClr val="accent1"/>
+          </a:effectRef>
+          <a:fontRef idx="minor">
+            <a:schemeClr val="lt1"/>
+          </a:fontRef>
+        </p:style>
+        <p:txBody>
+          <a:bodyPr rtlCol="0" anchor="ctr"/>
+          <a:lstStyle/>
+          <a:p>
+            <a:pPr algn="ctr"/>
+            <a:endParaRPr lang="en-US"/>
+          </a:p>
+        </p:txBody>
+      </p:sp>
+      <p:sp>
+        <p:nvSpPr>
+          <p:cNvPr id="27" name="Arrow: Right 26">
+            <a:extLst>
+              <a:ext uri="{FF2B5EF4-FFF2-40B4-BE49-F238E27FC236}">
+                <a16:creationId xmlns:a16="http://schemas.microsoft.com/office/drawing/2014/main" id="{46727ADE-2259-45A1-71B2-99743B423109}"/>
+              </a:ext>
+            </a:extLst>
+          </p:cNvPr>
+          <p:cNvSpPr/>
+          <p:nvPr/>
+        </p:nvSpPr>
+        <p:spPr>
+          <a:xfrm rot="5400000">
+            <a:off x="8197602" y="4955191"/>
+            <a:ext cx="704596" cy="539496"/>
+          </a:xfrm>
+          <a:prstGeom prst="rightArrow">
+            <a:avLst/>
+          </a:prstGeom>
+        </p:spPr>
+        <p:style>
+          <a:lnRef idx="2">
+            <a:schemeClr val="accent1">
+              <a:shade val="15000"/>
+            </a:schemeClr>
+          </a:lnRef>
+          <a:fillRef idx="1">
+            <a:schemeClr val="accent1"/>
+          </a:fillRef>
+          <a:effectRef idx="0">
+            <a:schemeClr val="accent1"/>
+          </a:effectRef>
+          <a:fontRef idx="minor">
+            <a:schemeClr val="lt1"/>
+          </a:fontRef>
+        </p:style>
+        <p:txBody>
+          <a:bodyPr rtlCol="0" anchor="ctr"/>
+          <a:lstStyle/>
+          <a:p>
+            <a:pPr algn="ctr"/>
+            <a:endParaRPr lang="en-US"/>
+          </a:p>
+        </p:txBody>
+      </p:sp>
+      <p:sp>
+        <p:nvSpPr>
+          <p:cNvPr id="29" name="Arrow: Right 28">
+            <a:extLst>
+              <a:ext uri="{FF2B5EF4-FFF2-40B4-BE49-F238E27FC236}">
+                <a16:creationId xmlns:a16="http://schemas.microsoft.com/office/drawing/2014/main" id="{CD9CF9DB-763B-9C6D-4F23-2E876B3B2178}"/>
+              </a:ext>
+            </a:extLst>
+          </p:cNvPr>
+          <p:cNvSpPr/>
+          <p:nvPr/>
+        </p:nvSpPr>
+        <p:spPr>
+          <a:xfrm rot="10800000">
+            <a:off x="7508510" y="2946535"/>
+            <a:ext cx="2711742" cy="539496"/>
+          </a:xfrm>
+          <a:prstGeom prst="rightArrow">
+            <a:avLst/>
+          </a:prstGeom>
+        </p:spPr>
+        <p:style>
+          <a:lnRef idx="2">
+            <a:schemeClr val="accent1">
+              <a:shade val="15000"/>
+            </a:schemeClr>
+          </a:lnRef>
+          <a:fillRef idx="1">
+            <a:schemeClr val="accent1"/>
+          </a:fillRef>
+          <a:effectRef idx="0">
+            <a:schemeClr val="accent1"/>
+          </a:effectRef>
+          <a:fontRef idx="minor">
+            <a:schemeClr val="lt1"/>
+          </a:fontRef>
+        </p:style>
+        <p:txBody>
+          <a:bodyPr rtlCol="0" anchor="ctr"/>
+          <a:lstStyle/>
+          <a:p>
+            <a:pPr algn="ctr"/>
+            <a:endParaRPr lang="en-US"/>
+          </a:p>
+        </p:txBody>
+      </p:sp>
+      <p:sp>
+        <p:nvSpPr>
+          <p:cNvPr id="31" name="TextBox 30">
+            <a:extLst>
+              <a:ext uri="{FF2B5EF4-FFF2-40B4-BE49-F238E27FC236}">
+                <a16:creationId xmlns:a16="http://schemas.microsoft.com/office/drawing/2014/main" id="{305F25C3-218B-E677-38B7-1DFD53DD1166}"/>
+              </a:ext>
+            </a:extLst>
+          </p:cNvPr>
+          <p:cNvSpPr txBox="1"/>
+          <p:nvPr/>
+        </p:nvSpPr>
+        <p:spPr>
+          <a:xfrm>
+            <a:off x="7177598" y="4119426"/>
+            <a:ext cx="367408" cy="523220"/>
+          </a:xfrm>
+          <a:prstGeom prst="rect">
+            <a:avLst/>
+          </a:prstGeom>
+          <a:noFill/>
+        </p:spPr>
+        <p:txBody>
+          <a:bodyPr wrap="square" rtlCol="0">
+            <a:spAutoFit/>
+          </a:bodyPr>
+          <a:lstStyle/>
+          <a:p>
+            <a:r>
+              <a:rPr lang="en-US" sz="2800" b="1" dirty="0">
+                <a:solidFill>
+                  <a:schemeClr val="accent6">
+                    <a:lumMod val="60000"/>
+                    <a:lumOff val="40000"/>
+                  </a:schemeClr>
+                </a:solidFill>
+              </a:rPr>
+              <a:t>1</a:t>
+            </a:r>
+          </a:p>
+        </p:txBody>
+      </p:sp>
+      <p:sp>
+        <p:nvSpPr>
+          <p:cNvPr id="34" name="TextBox 33">
+            <a:extLst>
+              <a:ext uri="{FF2B5EF4-FFF2-40B4-BE49-F238E27FC236}">
+                <a16:creationId xmlns:a16="http://schemas.microsoft.com/office/drawing/2014/main" id="{2441FE8F-0766-4E96-07C4-787B4D292E84}"/>
+              </a:ext>
+            </a:extLst>
+          </p:cNvPr>
+          <p:cNvSpPr txBox="1"/>
+          <p:nvPr/>
+        </p:nvSpPr>
+        <p:spPr>
+          <a:xfrm>
+            <a:off x="7765966" y="5253791"/>
+            <a:ext cx="367408" cy="523220"/>
+          </a:xfrm>
+          <a:prstGeom prst="rect">
+            <a:avLst/>
+          </a:prstGeom>
+          <a:noFill/>
+        </p:spPr>
+        <p:txBody>
+          <a:bodyPr wrap="square" rtlCol="0">
+            <a:spAutoFit/>
+          </a:bodyPr>
+          <a:lstStyle/>
+          <a:p>
+            <a:r>
+              <a:rPr lang="en-US" sz="2800" b="1" dirty="0">
+                <a:solidFill>
+                  <a:schemeClr val="accent6">
+                    <a:lumMod val="60000"/>
+                    <a:lumOff val="40000"/>
+                  </a:schemeClr>
+                </a:solidFill>
+              </a:rPr>
+              <a:t>2</a:t>
+            </a:r>
+          </a:p>
+        </p:txBody>
+      </p:sp>
+      <p:sp>
+        <p:nvSpPr>
+          <p:cNvPr id="36" name="TextBox 35">
+            <a:extLst>
+              <a:ext uri="{FF2B5EF4-FFF2-40B4-BE49-F238E27FC236}">
+                <a16:creationId xmlns:a16="http://schemas.microsoft.com/office/drawing/2014/main" id="{39E96569-7A74-BEAE-74CC-1073CF88BA19}"/>
+              </a:ext>
+            </a:extLst>
+          </p:cNvPr>
+          <p:cNvSpPr txBox="1"/>
+          <p:nvPr/>
+        </p:nvSpPr>
+        <p:spPr>
+          <a:xfrm>
+            <a:off x="9800992" y="4208053"/>
+            <a:ext cx="367408" cy="523220"/>
+          </a:xfrm>
+          <a:prstGeom prst="rect">
+            <a:avLst/>
+          </a:prstGeom>
+          <a:noFill/>
+        </p:spPr>
+        <p:txBody>
+          <a:bodyPr wrap="square" rtlCol="0">
+            <a:spAutoFit/>
+          </a:bodyPr>
+          <a:lstStyle/>
+          <a:p>
+            <a:r>
+              <a:rPr lang="en-US" sz="2800" b="1" dirty="0">
+                <a:solidFill>
+                  <a:schemeClr val="accent6">
+                    <a:lumMod val="60000"/>
+                    <a:lumOff val="40000"/>
+                  </a:schemeClr>
+                </a:solidFill>
+              </a:rPr>
+              <a:t>4</a:t>
+            </a:r>
+          </a:p>
+        </p:txBody>
+      </p:sp>
+      <p:sp>
+        <p:nvSpPr>
+          <p:cNvPr id="38" name="TextBox 37">
+            <a:extLst>
+              <a:ext uri="{FF2B5EF4-FFF2-40B4-BE49-F238E27FC236}">
+                <a16:creationId xmlns:a16="http://schemas.microsoft.com/office/drawing/2014/main" id="{273EC2EC-1F9A-64F7-3EFA-F75D549CE591}"/>
+              </a:ext>
+            </a:extLst>
+          </p:cNvPr>
+          <p:cNvSpPr txBox="1"/>
+          <p:nvPr/>
+        </p:nvSpPr>
+        <p:spPr>
+          <a:xfrm>
+            <a:off x="8635944" y="2675645"/>
+            <a:ext cx="367408" cy="523220"/>
+          </a:xfrm>
+          <a:prstGeom prst="rect">
+            <a:avLst/>
+          </a:prstGeom>
+          <a:noFill/>
+        </p:spPr>
+        <p:txBody>
+          <a:bodyPr wrap="square" rtlCol="0">
+            <a:spAutoFit/>
+          </a:bodyPr>
+          <a:lstStyle/>
+          <a:p>
+            <a:r>
+              <a:rPr lang="en-US" sz="2800" b="1" dirty="0">
+                <a:solidFill>
+                  <a:schemeClr val="accent6">
+                    <a:lumMod val="60000"/>
+                    <a:lumOff val="40000"/>
+                  </a:schemeClr>
+                </a:solidFill>
+              </a:rPr>
+              <a:t>5</a:t>
+            </a:r>
+          </a:p>
+        </p:txBody>
+      </p:sp>
+      <p:sp>
+        <p:nvSpPr>
+          <p:cNvPr id="40" name="Arrow: Right 39">
+            <a:extLst>
+              <a:ext uri="{FF2B5EF4-FFF2-40B4-BE49-F238E27FC236}">
+                <a16:creationId xmlns:a16="http://schemas.microsoft.com/office/drawing/2014/main" id="{56B8EDE5-D32B-DB5E-1E31-F41A3E060303}"/>
+              </a:ext>
+            </a:extLst>
+          </p:cNvPr>
+          <p:cNvSpPr/>
+          <p:nvPr/>
+        </p:nvSpPr>
+        <p:spPr>
+          <a:xfrm rot="16200000">
+            <a:off x="8704276" y="4893355"/>
+            <a:ext cx="704596" cy="539496"/>
+          </a:xfrm>
+          <a:prstGeom prst="rightArrow">
+            <a:avLst/>
+          </a:prstGeom>
+        </p:spPr>
+        <p:style>
+          <a:lnRef idx="2">
+            <a:schemeClr val="accent1">
+              <a:shade val="15000"/>
+            </a:schemeClr>
+          </a:lnRef>
+          <a:fillRef idx="1">
+            <a:schemeClr val="accent1"/>
+          </a:fillRef>
+          <a:effectRef idx="0">
+            <a:schemeClr val="accent1"/>
+          </a:effectRef>
+          <a:fontRef idx="minor">
+            <a:schemeClr val="lt1"/>
+          </a:fontRef>
+        </p:style>
+        <p:txBody>
+          <a:bodyPr rtlCol="0" anchor="ctr"/>
+          <a:lstStyle/>
+          <a:p>
+            <a:pPr algn="ctr"/>
+            <a:endParaRPr lang="en-US"/>
+          </a:p>
+        </p:txBody>
+      </p:sp>
+      <p:sp>
+        <p:nvSpPr>
+          <p:cNvPr id="42" name="TextBox 41">
+            <a:extLst>
+              <a:ext uri="{FF2B5EF4-FFF2-40B4-BE49-F238E27FC236}">
+                <a16:creationId xmlns:a16="http://schemas.microsoft.com/office/drawing/2014/main" id="{91410AAC-A1F1-8F69-95ED-3E20F5765B07}"/>
+              </a:ext>
+            </a:extLst>
+          </p:cNvPr>
+          <p:cNvSpPr txBox="1"/>
+          <p:nvPr/>
+        </p:nvSpPr>
+        <p:spPr>
+          <a:xfrm>
+            <a:off x="9230401" y="5089199"/>
+            <a:ext cx="367408" cy="523220"/>
+          </a:xfrm>
+          <a:prstGeom prst="rect">
+            <a:avLst/>
+          </a:prstGeom>
+          <a:noFill/>
+        </p:spPr>
+        <p:txBody>
+          <a:bodyPr wrap="square" rtlCol="0">
+            <a:spAutoFit/>
+          </a:bodyPr>
+          <a:lstStyle/>
+          <a:p>
+            <a:r>
+              <a:rPr lang="en-US" sz="2800" b="1" dirty="0">
+                <a:solidFill>
+                  <a:schemeClr val="accent6">
+                    <a:lumMod val="60000"/>
+                    <a:lumOff val="40000"/>
+                  </a:schemeClr>
+                </a:solidFill>
+              </a:rPr>
+              <a:t>3</a:t>
+            </a:r>
+          </a:p>
+        </p:txBody>
+      </p:sp>
+      <p:sp>
+        <p:nvSpPr>
+          <p:cNvPr id="5" name="TextBox 4">
+            <a:extLst>
+              <a:ext uri="{FF2B5EF4-FFF2-40B4-BE49-F238E27FC236}">
+                <a16:creationId xmlns:a16="http://schemas.microsoft.com/office/drawing/2014/main" id="{06D866FE-5559-F5B9-0AC9-E221A86165A5}"/>
+              </a:ext>
+            </a:extLst>
+          </p:cNvPr>
+          <p:cNvSpPr txBox="1"/>
+          <p:nvPr/>
+        </p:nvSpPr>
+        <p:spPr>
+          <a:xfrm>
+            <a:off x="279138" y="4004286"/>
+            <a:ext cx="6190488" cy="2169825"/>
+          </a:xfrm>
+          <a:prstGeom prst="rect">
+            <a:avLst/>
+          </a:prstGeom>
+          <a:noFill/>
+        </p:spPr>
+        <p:txBody>
+          <a:bodyPr wrap="square">
+            <a:spAutoFit/>
+          </a:bodyPr>
+          <a:lstStyle/>
+          <a:p>
+            <a:pPr marR="0" lvl="0">
+              <a:spcBef>
+                <a:spcPts val="900"/>
+              </a:spcBef>
+              <a:spcAft>
+                <a:spcPts val="900"/>
+              </a:spcAft>
+            </a:pPr>
+            <a:r>
+              <a:rPr lang="en-US" sz="2000" b="1" dirty="0">
+                <a:solidFill>
+                  <a:schemeClr val="accent6">
+                    <a:lumMod val="60000"/>
+                    <a:lumOff val="40000"/>
+                  </a:schemeClr>
+                </a:solidFill>
+              </a:rPr>
+              <a:t>3.</a:t>
+            </a:r>
+            <a:r>
+              <a:rPr lang="en-US" sz="2000" b="1" u="none" strike="noStrike" dirty="0">
+                <a:solidFill>
+                  <a:schemeClr val="accent6">
+                    <a:lumMod val="60000"/>
+                    <a:lumOff val="40000"/>
+                  </a:schemeClr>
+                </a:solidFill>
+                <a:effectLst/>
+                <a:latin typeface="+mn-lt"/>
+              </a:rPr>
+              <a:t> Generation:</a:t>
+            </a:r>
+            <a:r>
+              <a:rPr lang="en-US" sz="2000" b="0" u="none" strike="noStrike" dirty="0">
+                <a:solidFill>
+                  <a:schemeClr val="accent6">
+                    <a:lumMod val="60000"/>
+                    <a:lumOff val="40000"/>
+                  </a:schemeClr>
+                </a:solidFill>
+                <a:effectLst/>
+                <a:latin typeface="+mn-lt"/>
+              </a:rPr>
+              <a:t> The LLM gets a prompt stuffed with incomplete fragments.</a:t>
+            </a:r>
+          </a:p>
+          <a:p>
+            <a:pPr marR="0" lvl="0">
+              <a:spcBef>
+                <a:spcPts val="900"/>
+              </a:spcBef>
+              <a:spcAft>
+                <a:spcPts val="900"/>
+              </a:spcAft>
+            </a:pPr>
+            <a:r>
+              <a:rPr lang="en-US" sz="2000" b="1" u="none" strike="noStrike" dirty="0">
+                <a:solidFill>
+                  <a:schemeClr val="accent6">
+                    <a:lumMod val="60000"/>
+                    <a:lumOff val="40000"/>
+                  </a:schemeClr>
+                </a:solidFill>
+                <a:effectLst/>
+                <a:latin typeface="+mn-lt"/>
+              </a:rPr>
+              <a:t>Output:</a:t>
+            </a:r>
+            <a:r>
+              <a:rPr lang="en-US" sz="2000" b="0" u="none" strike="noStrike" dirty="0">
+                <a:solidFill>
+                  <a:schemeClr val="accent6">
+                    <a:lumMod val="60000"/>
+                    <a:lumOff val="40000"/>
+                  </a:schemeClr>
+                </a:solidFill>
+                <a:effectLst/>
+                <a:latin typeface="+mn-lt"/>
+              </a:rPr>
+              <a:t> </a:t>
+            </a:r>
+            <a:r>
+              <a:rPr lang="en-US" sz="2000" b="0" i="1" u="none" strike="noStrike" dirty="0">
+                <a:solidFill>
+                  <a:schemeClr val="accent6">
+                    <a:lumMod val="60000"/>
+                    <a:lumOff val="40000"/>
+                  </a:schemeClr>
+                </a:solidFill>
+                <a:effectLst/>
+                <a:latin typeface="+mn-lt"/>
+              </a:rPr>
+              <a:t>"According to our documents, Q2 revenue was $10M. However, I cannot find data on our competitor's revenue or the specific marketing ROI breakdown in the context provided."</a:t>
+            </a:r>
+            <a:endParaRPr lang="en-US" sz="2000" b="0" u="none" strike="noStrike" dirty="0">
+              <a:solidFill>
+                <a:schemeClr val="accent6">
+                  <a:lumMod val="60000"/>
+                  <a:lumOff val="40000"/>
+                </a:schemeClr>
+              </a:solidFill>
+              <a:effectLst/>
+              <a:latin typeface="+mn-lt"/>
+            </a:endParaRPr>
+          </a:p>
+        </p:txBody>
+      </p:sp>
+    </p:spTree>
+    <p:extLst>
+      <p:ext uri="{BB962C8B-B14F-4D97-AF65-F5344CB8AC3E}">
+        <p14:creationId xmlns:p14="http://schemas.microsoft.com/office/powerpoint/2010/main" val="232333289"/>
+      </p:ext>
+    </p:extLst>
+  </p:cSld>
+  <p:clrMapOvr>
+    <a:masterClrMapping/>
+  </p:clrMapOvr>
+</p:sld>
+</file>
+
+<file path=ppt/slides/slide5.xml><?xml version="1.0" encoding="utf-8"?>
 <p:sld xmlns:a="http://schemas.openxmlformats.org/drawingml/2006/main" xmlns:r="http://schemas.openxmlformats.org/officeDocument/2006/relationships" xmlns:p="http://schemas.openxmlformats.org/presentationml/2006/main">
   <p:cSld>
     <p:spTree>
@@ -5950,10 +7319,78 @@
       </p:sp>
       <p:sp>
         <p:nvSpPr>
-          <p:cNvPr id="3" name="Oval 2">
-            <a:extLst>
-              <a:ext uri="{FF2B5EF4-FFF2-40B4-BE49-F238E27FC236}">
-                <a16:creationId xmlns:a16="http://schemas.microsoft.com/office/drawing/2014/main" id="{015AE0D4-178C-9EB1-72C5-B1D3600A0C30}"/>
+          <p:cNvPr id="32" name="TextBox 31">
+            <a:extLst>
+              <a:ext uri="{FF2B5EF4-FFF2-40B4-BE49-F238E27FC236}">
+                <a16:creationId xmlns:a16="http://schemas.microsoft.com/office/drawing/2014/main" id="{37EB175D-44DD-953C-93C4-7C3C6F056BA0}"/>
+              </a:ext>
+            </a:extLst>
+          </p:cNvPr>
+          <p:cNvSpPr txBox="1"/>
+          <p:nvPr/>
+        </p:nvSpPr>
+        <p:spPr>
+          <a:xfrm>
+            <a:off x="0" y="616744"/>
+            <a:ext cx="11704320" cy="1938992"/>
+          </a:xfrm>
+          <a:prstGeom prst="rect">
+            <a:avLst/>
+          </a:prstGeom>
+          <a:noFill/>
+        </p:spPr>
+        <p:txBody>
+          <a:bodyPr wrap="square">
+            <a:spAutoFit/>
+          </a:bodyPr>
+          <a:lstStyle/>
+          <a:p>
+            <a:r>
+              <a:rPr lang="en-US" sz="2400" b="1" u="sng" dirty="0">
+                <a:solidFill>
+                  <a:schemeClr val="accent6">
+                    <a:lumMod val="60000"/>
+                    <a:lumOff val="40000"/>
+                  </a:schemeClr>
+                </a:solidFill>
+              </a:rPr>
+              <a:t>The Problem: </a:t>
+            </a:r>
+          </a:p>
+          <a:p>
+            <a:r>
+              <a:rPr lang="en-US" sz="2400" dirty="0">
+                <a:solidFill>
+                  <a:schemeClr val="accent6">
+                    <a:lumMod val="60000"/>
+                    <a:lumOff val="40000"/>
+                  </a:schemeClr>
+                </a:solidFill>
+              </a:rPr>
+              <a:t>It cannot handle multi-step reasoning. </a:t>
+            </a:r>
+          </a:p>
+          <a:p>
+            <a:r>
+              <a:rPr lang="en-US" sz="2400" dirty="0">
+                <a:solidFill>
+                  <a:schemeClr val="accent6">
+                    <a:lumMod val="60000"/>
+                    <a:lumOff val="40000"/>
+                  </a:schemeClr>
+                </a:solidFill>
+              </a:rPr>
+              <a:t>If your query requires fetching information from Document A, realizing it needs a missing variable, and tracking that variable down in Document B, traditional RAG will usually fail or give an incomplete answer.</a:t>
+            </a:r>
+          </a:p>
+        </p:txBody>
+      </p:sp>
+      <p:sp>
+        <p:nvSpPr>
+          <p:cNvPr id="4" name="Oval 3">
+            <a:extLst>
+              <a:ext uri="{FF2B5EF4-FFF2-40B4-BE49-F238E27FC236}">
+                <a16:creationId xmlns:a16="http://schemas.microsoft.com/office/drawing/2014/main" id="{3A0AD4DF-85A1-1A66-0386-7BAC19F819F7}"/>
               </a:ext>
             </a:extLst>
           </p:cNvPr>
@@ -5962,7 +7399,7 @@
         </p:nvSpPr>
         <p:spPr>
           <a:xfrm>
-            <a:off x="6096000" y="2978485"/>
+            <a:off x="6179274" y="2954813"/>
             <a:ext cx="1306584" cy="1124712"/>
           </a:xfrm>
           <a:prstGeom prst="ellipse">
@@ -5999,10 +7436,10 @@
       </p:sp>
       <p:sp>
         <p:nvSpPr>
-          <p:cNvPr id="5" name="Oval 4">
-            <a:extLst>
-              <a:ext uri="{FF2B5EF4-FFF2-40B4-BE49-F238E27FC236}">
-                <a16:creationId xmlns:a16="http://schemas.microsoft.com/office/drawing/2014/main" id="{9D3A888F-7E4A-CBEB-241F-8E9AC979BE14}"/>
+          <p:cNvPr id="8" name="Oval 7">
+            <a:extLst>
+              <a:ext uri="{FF2B5EF4-FFF2-40B4-BE49-F238E27FC236}">
+                <a16:creationId xmlns:a16="http://schemas.microsoft.com/office/drawing/2014/main" id="{DC0C488A-210A-2409-9422-CE2719E58094}"/>
               </a:ext>
             </a:extLst>
           </p:cNvPr>
@@ -6055,10 +7492,10 @@
       </p:sp>
       <p:sp>
         <p:nvSpPr>
-          <p:cNvPr id="7" name="Rectangle 6">
-            <a:extLst>
-              <a:ext uri="{FF2B5EF4-FFF2-40B4-BE49-F238E27FC236}">
-                <a16:creationId xmlns:a16="http://schemas.microsoft.com/office/drawing/2014/main" id="{D9AC457F-B11B-A0AA-411F-6C986D6B8BF5}"/>
+          <p:cNvPr id="14" name="Rectangle 13">
+            <a:extLst>
+              <a:ext uri="{FF2B5EF4-FFF2-40B4-BE49-F238E27FC236}">
+                <a16:creationId xmlns:a16="http://schemas.microsoft.com/office/drawing/2014/main" id="{D58629EA-A02C-0483-C949-A0E0F610D54C}"/>
               </a:ext>
             </a:extLst>
           </p:cNvPr>
@@ -6114,10 +7551,10 @@
       </p:sp>
       <p:sp>
         <p:nvSpPr>
-          <p:cNvPr id="10" name="Oval 9">
-            <a:extLst>
-              <a:ext uri="{FF2B5EF4-FFF2-40B4-BE49-F238E27FC236}">
-                <a16:creationId xmlns:a16="http://schemas.microsoft.com/office/drawing/2014/main" id="{426DCFC2-599B-92A8-7AAA-8AEB06268982}"/>
+          <p:cNvPr id="18" name="Oval 17">
+            <a:extLst>
+              <a:ext uri="{FF2B5EF4-FFF2-40B4-BE49-F238E27FC236}">
+                <a16:creationId xmlns:a16="http://schemas.microsoft.com/office/drawing/2014/main" id="{53EAE922-E149-D4FC-1E72-04E401169937}"/>
               </a:ext>
             </a:extLst>
           </p:cNvPr>
@@ -6126,7 +7563,7 @@
         </p:nvSpPr>
         <p:spPr>
           <a:xfrm>
-            <a:off x="8081045" y="5191795"/>
+            <a:off x="8081045" y="5667283"/>
             <a:ext cx="1566672" cy="1100328"/>
           </a:xfrm>
           <a:prstGeom prst="ellipse">
@@ -6163,10 +7600,10 @@
       </p:sp>
       <p:sp>
         <p:nvSpPr>
-          <p:cNvPr id="12" name="Oval 11">
-            <a:extLst>
-              <a:ext uri="{FF2B5EF4-FFF2-40B4-BE49-F238E27FC236}">
-                <a16:creationId xmlns:a16="http://schemas.microsoft.com/office/drawing/2014/main" id="{C00963DA-E7DE-CC02-2AFE-EE1C1FBE1D74}"/>
+          <p:cNvPr id="23" name="Oval 22">
+            <a:extLst>
+              <a:ext uri="{FF2B5EF4-FFF2-40B4-BE49-F238E27FC236}">
+                <a16:creationId xmlns:a16="http://schemas.microsoft.com/office/drawing/2014/main" id="{FE90337E-41DD-A293-CD6C-AC41E4B1A365}"/>
               </a:ext>
             </a:extLst>
           </p:cNvPr>
@@ -6175,7 +7612,7 @@
         </p:nvSpPr>
         <p:spPr>
           <a:xfrm>
-            <a:off x="8081045" y="3178665"/>
+            <a:off x="8081045" y="3891897"/>
             <a:ext cx="1479351" cy="962184"/>
           </a:xfrm>
           <a:prstGeom prst="ellipse">
@@ -6212,10 +7649,10 @@
       </p:sp>
       <p:sp>
         <p:nvSpPr>
-          <p:cNvPr id="13" name="Arrow: Right 12">
-            <a:extLst>
-              <a:ext uri="{FF2B5EF4-FFF2-40B4-BE49-F238E27FC236}">
-                <a16:creationId xmlns:a16="http://schemas.microsoft.com/office/drawing/2014/main" id="{9DF98E9B-A0EE-5183-7429-144226CD599A}"/>
+          <p:cNvPr id="27" name="Arrow: Right 26">
+            <a:extLst>
+              <a:ext uri="{FF2B5EF4-FFF2-40B4-BE49-F238E27FC236}">
+                <a16:creationId xmlns:a16="http://schemas.microsoft.com/office/drawing/2014/main" id="{B7B56964-D5CC-5B88-81D3-E2202BA524DB}"/>
               </a:ext>
             </a:extLst>
           </p:cNvPr>
@@ -6223,8 +7660,8 @@
           <p:nvPr/>
         </p:nvSpPr>
         <p:spPr>
-          <a:xfrm>
-            <a:off x="7502106" y="3340019"/>
+          <a:xfrm rot="2308375">
+            <a:off x="7404496" y="3789935"/>
             <a:ext cx="579360" cy="539496"/>
           </a:xfrm>
           <a:prstGeom prst="rightArrow">
@@ -6258,10 +7695,10 @@
       </p:sp>
       <p:sp>
         <p:nvSpPr>
-          <p:cNvPr id="15" name="Arrow: Right 14">
-            <a:extLst>
-              <a:ext uri="{FF2B5EF4-FFF2-40B4-BE49-F238E27FC236}">
-                <a16:creationId xmlns:a16="http://schemas.microsoft.com/office/drawing/2014/main" id="{6ED94145-4C64-A97C-A868-93C530688990}"/>
+          <p:cNvPr id="31" name="Arrow: Right 30">
+            <a:extLst>
+              <a:ext uri="{FF2B5EF4-FFF2-40B4-BE49-F238E27FC236}">
+                <a16:creationId xmlns:a16="http://schemas.microsoft.com/office/drawing/2014/main" id="{41AD5121-297B-241E-0C30-B6BCA6933F34}"/>
               </a:ext>
             </a:extLst>
           </p:cNvPr>
@@ -6269,8 +7706,8 @@
           <p:nvPr/>
         </p:nvSpPr>
         <p:spPr>
-          <a:xfrm>
-            <a:off x="9595947" y="3427238"/>
+          <a:xfrm rot="19171423">
+            <a:off x="9552414" y="3740760"/>
             <a:ext cx="669418" cy="539496"/>
           </a:xfrm>
           <a:prstGeom prst="rightArrow">
@@ -6304,10 +7741,10 @@
       </p:sp>
       <p:sp>
         <p:nvSpPr>
-          <p:cNvPr id="17" name="Arrow: Right 16">
-            <a:extLst>
-              <a:ext uri="{FF2B5EF4-FFF2-40B4-BE49-F238E27FC236}">
-                <a16:creationId xmlns:a16="http://schemas.microsoft.com/office/drawing/2014/main" id="{278677A8-91D4-84E3-A3E8-776E5DC74FC7}"/>
+          <p:cNvPr id="34" name="Arrow: Right 33">
+            <a:extLst>
+              <a:ext uri="{FF2B5EF4-FFF2-40B4-BE49-F238E27FC236}">
+                <a16:creationId xmlns:a16="http://schemas.microsoft.com/office/drawing/2014/main" id="{0D898309-5ABF-02B5-A69F-FD8C202BF15F}"/>
               </a:ext>
             </a:extLst>
           </p:cNvPr>
@@ -6316,7 +7753,7 @@
         </p:nvSpPr>
         <p:spPr>
           <a:xfrm rot="5400000">
-            <a:off x="8197602" y="4369975"/>
+            <a:off x="8197602" y="4955191"/>
             <a:ext cx="704596" cy="539496"/>
           </a:xfrm>
           <a:prstGeom prst="rightArrow">
@@ -6350,10 +7787,10 @@
       </p:sp>
       <p:sp>
         <p:nvSpPr>
-          <p:cNvPr id="19" name="Arrow: Right 18">
-            <a:extLst>
-              <a:ext uri="{FF2B5EF4-FFF2-40B4-BE49-F238E27FC236}">
-                <a16:creationId xmlns:a16="http://schemas.microsoft.com/office/drawing/2014/main" id="{5295B952-2383-2048-0F26-34FE86C5A56D}"/>
+          <p:cNvPr id="36" name="Arrow: Right 35">
+            <a:extLst>
+              <a:ext uri="{FF2B5EF4-FFF2-40B4-BE49-F238E27FC236}">
+                <a16:creationId xmlns:a16="http://schemas.microsoft.com/office/drawing/2014/main" id="{2D31E981-B8C7-ECF1-4BF9-96CE9DD4E74B}"/>
               </a:ext>
             </a:extLst>
           </p:cNvPr>
@@ -6362,7 +7799,7 @@
         </p:nvSpPr>
         <p:spPr>
           <a:xfrm rot="10800000">
-            <a:off x="7502106" y="2708737"/>
+            <a:off x="7508510" y="2946535"/>
             <a:ext cx="2711742" cy="539496"/>
           </a:xfrm>
           <a:prstGeom prst="rightArrow">
@@ -6396,10 +7833,10 @@
       </p:sp>
       <p:sp>
         <p:nvSpPr>
-          <p:cNvPr id="20" name="TextBox 19">
-            <a:extLst>
-              <a:ext uri="{FF2B5EF4-FFF2-40B4-BE49-F238E27FC236}">
-                <a16:creationId xmlns:a16="http://schemas.microsoft.com/office/drawing/2014/main" id="{F2A2BAC0-BD8C-2C83-B4E5-FA5D6F547BEC}"/>
+          <p:cNvPr id="38" name="TextBox 37">
+            <a:extLst>
+              <a:ext uri="{FF2B5EF4-FFF2-40B4-BE49-F238E27FC236}">
+                <a16:creationId xmlns:a16="http://schemas.microsoft.com/office/drawing/2014/main" id="{1A475582-1B85-EA2E-E5EE-0C315EA51CB2}"/>
               </a:ext>
             </a:extLst>
           </p:cNvPr>
@@ -6408,7 +7845,7 @@
         </p:nvSpPr>
         <p:spPr>
           <a:xfrm>
-            <a:off x="7539501" y="3823882"/>
+            <a:off x="7177598" y="4119426"/>
             <a:ext cx="367408" cy="523220"/>
           </a:xfrm>
           <a:prstGeom prst="rect">
@@ -6438,10 +7875,10 @@
       </p:sp>
       <p:sp>
         <p:nvSpPr>
-          <p:cNvPr id="22" name="TextBox 21">
-            <a:extLst>
-              <a:ext uri="{FF2B5EF4-FFF2-40B4-BE49-F238E27FC236}">
-                <a16:creationId xmlns:a16="http://schemas.microsoft.com/office/drawing/2014/main" id="{F3FDC6BD-346D-B89F-D0FA-F2CD3116827B}"/>
+          <p:cNvPr id="40" name="TextBox 39">
+            <a:extLst>
+              <a:ext uri="{FF2B5EF4-FFF2-40B4-BE49-F238E27FC236}">
+                <a16:creationId xmlns:a16="http://schemas.microsoft.com/office/drawing/2014/main" id="{9B5E5BDF-5930-EC71-B430-FEE21E827804}"/>
               </a:ext>
             </a:extLst>
           </p:cNvPr>
@@ -6450,7 +7887,7 @@
         </p:nvSpPr>
         <p:spPr>
           <a:xfrm>
-            <a:off x="7765966" y="4668575"/>
+            <a:off x="7765966" y="5253791"/>
             <a:ext cx="367408" cy="523220"/>
           </a:xfrm>
           <a:prstGeom prst="rect">
@@ -6480,10 +7917,10 @@
       </p:sp>
       <p:sp>
         <p:nvSpPr>
-          <p:cNvPr id="24" name="TextBox 23">
-            <a:extLst>
-              <a:ext uri="{FF2B5EF4-FFF2-40B4-BE49-F238E27FC236}">
-                <a16:creationId xmlns:a16="http://schemas.microsoft.com/office/drawing/2014/main" id="{A12D617A-1348-7E0B-0590-4AB71F9ADDC8}"/>
+          <p:cNvPr id="42" name="TextBox 41">
+            <a:extLst>
+              <a:ext uri="{FF2B5EF4-FFF2-40B4-BE49-F238E27FC236}">
+                <a16:creationId xmlns:a16="http://schemas.microsoft.com/office/drawing/2014/main" id="{761C304C-B51C-8C50-4403-9D33592F0968}"/>
               </a:ext>
             </a:extLst>
           </p:cNvPr>
@@ -6492,7 +7929,7 @@
         </p:nvSpPr>
         <p:spPr>
           <a:xfrm>
-            <a:off x="9679690" y="3857816"/>
+            <a:off x="9800992" y="4208053"/>
             <a:ext cx="367408" cy="523220"/>
           </a:xfrm>
           <a:prstGeom prst="rect">
@@ -6522,10 +7959,10 @@
       </p:sp>
       <p:sp>
         <p:nvSpPr>
-          <p:cNvPr id="26" name="TextBox 25">
-            <a:extLst>
-              <a:ext uri="{FF2B5EF4-FFF2-40B4-BE49-F238E27FC236}">
-                <a16:creationId xmlns:a16="http://schemas.microsoft.com/office/drawing/2014/main" id="{26D10CE6-33D7-560D-5ACD-40B240CD94DB}"/>
+          <p:cNvPr id="44" name="TextBox 43">
+            <a:extLst>
+              <a:ext uri="{FF2B5EF4-FFF2-40B4-BE49-F238E27FC236}">
+                <a16:creationId xmlns:a16="http://schemas.microsoft.com/office/drawing/2014/main" id="{2FFC5218-FE5B-E606-D60E-3F7FC0421F74}"/>
               </a:ext>
             </a:extLst>
           </p:cNvPr>
@@ -6534,7 +7971,7 @@
         </p:nvSpPr>
         <p:spPr>
           <a:xfrm>
-            <a:off x="8539537" y="2431593"/>
+            <a:off x="8635944" y="2675645"/>
             <a:ext cx="367408" cy="523220"/>
           </a:xfrm>
           <a:prstGeom prst="rect">
@@ -6564,10 +8001,10 @@
       </p:sp>
       <p:sp>
         <p:nvSpPr>
-          <p:cNvPr id="28" name="Arrow: Right 27">
-            <a:extLst>
-              <a:ext uri="{FF2B5EF4-FFF2-40B4-BE49-F238E27FC236}">
-                <a16:creationId xmlns:a16="http://schemas.microsoft.com/office/drawing/2014/main" id="{C24C9AAB-37E7-FBAA-0A75-B7623B9069C3}"/>
+          <p:cNvPr id="46" name="Arrow: Right 45">
+            <a:extLst>
+              <a:ext uri="{FF2B5EF4-FFF2-40B4-BE49-F238E27FC236}">
+                <a16:creationId xmlns:a16="http://schemas.microsoft.com/office/drawing/2014/main" id="{A0870B4B-1DD4-86C9-ECB3-081E52CA20FE}"/>
               </a:ext>
             </a:extLst>
           </p:cNvPr>
@@ -6576,7 +8013,7 @@
         </p:nvSpPr>
         <p:spPr>
           <a:xfrm rot="16200000">
-            <a:off x="8704276" y="4308139"/>
+            <a:off x="8704276" y="4893355"/>
             <a:ext cx="704596" cy="539496"/>
           </a:xfrm>
           <a:prstGeom prst="rightArrow">
@@ -6610,10 +8047,10 @@
       </p:sp>
       <p:sp>
         <p:nvSpPr>
-          <p:cNvPr id="30" name="TextBox 29">
-            <a:extLst>
-              <a:ext uri="{FF2B5EF4-FFF2-40B4-BE49-F238E27FC236}">
-                <a16:creationId xmlns:a16="http://schemas.microsoft.com/office/drawing/2014/main" id="{B16FD344-9668-784D-B8B8-26DD38AF52D6}"/>
+          <p:cNvPr id="48" name="TextBox 47">
+            <a:extLst>
+              <a:ext uri="{FF2B5EF4-FFF2-40B4-BE49-F238E27FC236}">
+                <a16:creationId xmlns:a16="http://schemas.microsoft.com/office/drawing/2014/main" id="{E70057BA-551B-AD89-50BB-D5245C1D777C}"/>
               </a:ext>
             </a:extLst>
           </p:cNvPr>
@@ -6622,7 +8059,7 @@
         </p:nvSpPr>
         <p:spPr>
           <a:xfrm>
-            <a:off x="9230401" y="4668575"/>
+            <a:off x="9230401" y="5089199"/>
             <a:ext cx="367408" cy="523220"/>
           </a:xfrm>
           <a:prstGeom prst="rect">
@@ -6646,61 +8083,6 @@
                 </a:solidFill>
               </a:rPr>
               <a:t>3</a:t>
-            </a:r>
-          </a:p>
-        </p:txBody>
-      </p:sp>
-      <p:sp>
-        <p:nvSpPr>
-          <p:cNvPr id="32" name="TextBox 31">
-            <a:extLst>
-              <a:ext uri="{FF2B5EF4-FFF2-40B4-BE49-F238E27FC236}">
-                <a16:creationId xmlns:a16="http://schemas.microsoft.com/office/drawing/2014/main" id="{37EB175D-44DD-953C-93C4-7C3C6F056BA0}"/>
-              </a:ext>
-            </a:extLst>
-          </p:cNvPr>
-          <p:cNvSpPr txBox="1"/>
-          <p:nvPr/>
-        </p:nvSpPr>
-        <p:spPr>
-          <a:xfrm>
-            <a:off x="0" y="616744"/>
-            <a:ext cx="11704320" cy="1569660"/>
-          </a:xfrm>
-          <a:prstGeom prst="rect">
-            <a:avLst/>
-          </a:prstGeom>
-          <a:noFill/>
-        </p:spPr>
-        <p:txBody>
-          <a:bodyPr wrap="square">
-            <a:spAutoFit/>
-          </a:bodyPr>
-          <a:lstStyle/>
-          <a:p>
-            <a:r>
-              <a:rPr lang="en-US" sz="2400" dirty="0">
-                <a:solidFill>
-                  <a:schemeClr val="accent6">
-                    <a:lumMod val="60000"/>
-                    <a:lumOff val="40000"/>
-                  </a:schemeClr>
-                </a:solidFill>
-              </a:rPr>
-              <a:t>The Problem: </a:t>
-            </a:r>
-          </a:p>
-          <a:p>
-            <a:r>
-              <a:rPr lang="en-US" sz="2400" dirty="0">
-                <a:solidFill>
-                  <a:schemeClr val="accent6">
-                    <a:lumMod val="60000"/>
-                    <a:lumOff val="40000"/>
-                  </a:schemeClr>
-                </a:solidFill>
-              </a:rPr>
-              <a:t>It cannot handle multi-step reasoning. If your query requires fetching information from Document A, realizing it needs a missing variable, and tracking that variable down in Document B, traditional RAG will usually fail or give an incomplete answer.</a:t>
             </a:r>
           </a:p>
         </p:txBody>
@@ -6718,7 +8100,7 @@
 </p:sld>
 </file>
 
-<file path=ppt/slides/slide5.xml><?xml version="1.0" encoding="utf-8"?>
+<file path=ppt/slides/slide6.xml><?xml version="1.0" encoding="utf-8"?>
 <p:sld xmlns:a="http://schemas.openxmlformats.org/drawingml/2006/main" xmlns:r="http://schemas.openxmlformats.org/officeDocument/2006/relationships" xmlns:p="http://schemas.openxmlformats.org/presentationml/2006/main">
   <p:cSld>
     <p:spTree>
@@ -6773,7 +8155,7 @@
               <a:buNone/>
             </a:pPr>
             <a:r>
-              <a:rPr lang="en-US" sz="2400" dirty="0">
+              <a:rPr lang="en-US" sz="2400" b="1" u="sng" dirty="0">
                 <a:solidFill>
                   <a:schemeClr val="accent6">
                     <a:lumMod val="60000"/>
@@ -6965,7 +8347,7 @@
 </p:sld>
 </file>
 
-<file path=ppt/slides/slide6.xml><?xml version="1.0" encoding="utf-8"?>
+<file path=ppt/slides/slide7.xml><?xml version="1.0" encoding="utf-8"?>
 <p:sld xmlns:a="http://schemas.openxmlformats.org/drawingml/2006/main" xmlns:r="http://schemas.openxmlformats.org/officeDocument/2006/relationships" xmlns:p="http://schemas.openxmlformats.org/presentationml/2006/main">
   <p:cSld>
     <p:spTree>
@@ -7017,7 +8399,7 @@
           <a:lstStyle/>
           <a:p>
             <a:r>
-              <a:rPr lang="en-US" sz="2400" dirty="0">
+              <a:rPr lang="en-US" sz="2400" b="1" u="sng" dirty="0">
                 <a:solidFill>
                   <a:schemeClr val="accent6">
                     <a:lumMod val="60000"/>
@@ -7025,7 +8407,18 @@
                   </a:schemeClr>
                 </a:solidFill>
               </a:rPr>
-              <a:t>Query: Compare our Q2 2026 revenue with our main competitor, and explain why our marketing spend didn't yield the expected ROI based on our internal strategy deck.</a:t>
+              <a:t>Query: </a:t>
+            </a:r>
+            <a:r>
+              <a:rPr lang="en-US" sz="2400" dirty="0">
+                <a:solidFill>
+                  <a:schemeClr val="accent6">
+                    <a:lumMod val="60000"/>
+                    <a:lumOff val="40000"/>
+                  </a:schemeClr>
+                </a:solidFill>
+              </a:rPr>
+              <a:t>Compare our Q2 2026 revenue with our main competitor, and explain why our marketing spend didn't yield the expected ROI based on our internal strategy deck.</a:t>
             </a:r>
           </a:p>
         </p:txBody>
@@ -7044,8 +8437,8 @@
         </p:nvSpPr>
         <p:spPr>
           <a:xfrm>
-            <a:off x="105156" y="830997"/>
-            <a:ext cx="10200132" cy="1431161"/>
+            <a:off x="123444" y="1443645"/>
+            <a:ext cx="6256391" cy="1800493"/>
           </a:xfrm>
           <a:prstGeom prst="rect">
             <a:avLst/>
@@ -7186,7 +8579,7 @@
 </p:sld>
 </file>
 
-<file path=ppt/slides/slide7.xml><?xml version="1.0" encoding="utf-8"?>
+<file path=ppt/slides/slide8.xml><?xml version="1.0" encoding="utf-8"?>
 <p:sld xmlns:a="http://schemas.openxmlformats.org/drawingml/2006/main" xmlns:r="http://schemas.openxmlformats.org/officeDocument/2006/relationships" xmlns:p="http://schemas.openxmlformats.org/presentationml/2006/main">
   <p:cSld>
     <p:spTree>
@@ -7483,7 +8876,7 @@
 </p:sld>
 </file>
 
-<file path=ppt/slides/slide8.xml><?xml version="1.0" encoding="utf-8"?>
+<file path=ppt/slides/slide9.xml><?xml version="1.0" encoding="utf-8"?>
 <p:sld xmlns:a="http://schemas.openxmlformats.org/drawingml/2006/main" xmlns:r="http://schemas.openxmlformats.org/officeDocument/2006/relationships" xmlns:p="http://schemas.openxmlformats.org/presentationml/2006/main">
   <p:cSld>
     <p:spTree>
@@ -7677,204 +9070,6 @@
     <p:extLst>
       <p:ext uri="{BB962C8B-B14F-4D97-AF65-F5344CB8AC3E}">
         <p14:creationId xmlns:p14="http://schemas.microsoft.com/office/powerpoint/2010/main" val="60867967"/>
-      </p:ext>
-    </p:extLst>
-  </p:cSld>
-  <p:clrMapOvr>
-    <a:masterClrMapping/>
-  </p:clrMapOvr>
-</p:sld>
-</file>
-
-<file path=ppt/slides/slide9.xml><?xml version="1.0" encoding="utf-8"?>
-<p:sld xmlns:a="http://schemas.openxmlformats.org/drawingml/2006/main" xmlns:r="http://schemas.openxmlformats.org/officeDocument/2006/relationships" xmlns:p="http://schemas.openxmlformats.org/presentationml/2006/main">
-  <p:cSld>
-    <p:spTree>
-      <p:nvGrpSpPr>
-        <p:cNvPr id="1" name="">
-          <a:extLst>
-            <a:ext uri="{FF2B5EF4-FFF2-40B4-BE49-F238E27FC236}">
-              <a16:creationId xmlns:a16="http://schemas.microsoft.com/office/drawing/2014/main" id="{DD931D7F-4279-DA2E-FA64-6CF3C441D414}"/>
-            </a:ext>
-          </a:extLst>
-        </p:cNvPr>
-        <p:cNvGrpSpPr/>
-        <p:nvPr/>
-      </p:nvGrpSpPr>
-      <p:grpSpPr>
-        <a:xfrm>
-          <a:off x="0" y="0"/>
-          <a:ext cx="0" cy="0"/>
-          <a:chOff x="0" y="0"/>
-          <a:chExt cx="0" cy="0"/>
-        </a:xfrm>
-      </p:grpSpPr>
-      <p:sp>
-        <p:nvSpPr>
-          <p:cNvPr id="2" name="Title 1">
-            <a:extLst>
-              <a:ext uri="{FF2B5EF4-FFF2-40B4-BE49-F238E27FC236}">
-                <a16:creationId xmlns:a16="http://schemas.microsoft.com/office/drawing/2014/main" id="{795E1B75-886E-0812-B2FD-DD250C225521}"/>
-              </a:ext>
-            </a:extLst>
-          </p:cNvPr>
-          <p:cNvSpPr>
-            <a:spLocks noGrp="1"/>
-          </p:cNvSpPr>
-          <p:nvPr>
-            <p:ph type="title"/>
-          </p:nvPr>
-        </p:nvSpPr>
-        <p:spPr>
-          <a:xfrm>
-            <a:off x="274320" y="136525"/>
-            <a:ext cx="11466576" cy="832739"/>
-          </a:xfrm>
-        </p:spPr>
-        <p:txBody>
-          <a:bodyPr>
-            <a:normAutofit/>
-          </a:bodyPr>
-          <a:lstStyle/>
-          <a:p>
-            <a:r>
-              <a:rPr lang="en-US" sz="3600" dirty="0"/>
-              <a:t>EXTRA</a:t>
-            </a:r>
-          </a:p>
-        </p:txBody>
-      </p:sp>
-      <p:sp>
-        <p:nvSpPr>
-          <p:cNvPr id="4" name="TextBox 3">
-            <a:extLst>
-              <a:ext uri="{FF2B5EF4-FFF2-40B4-BE49-F238E27FC236}">
-                <a16:creationId xmlns:a16="http://schemas.microsoft.com/office/drawing/2014/main" id="{902F8BE4-9CEA-0DAD-0357-E0A8215F169D}"/>
-              </a:ext>
-            </a:extLst>
-          </p:cNvPr>
-          <p:cNvSpPr txBox="1"/>
-          <p:nvPr/>
-        </p:nvSpPr>
-        <p:spPr>
-          <a:xfrm>
-            <a:off x="274320" y="933117"/>
-            <a:ext cx="11658600" cy="1477328"/>
-          </a:xfrm>
-          <a:prstGeom prst="rect">
-            <a:avLst/>
-          </a:prstGeom>
-          <a:noFill/>
-        </p:spPr>
-        <p:txBody>
-          <a:bodyPr wrap="square">
-            <a:spAutoFit/>
-          </a:bodyPr>
-          <a:lstStyle/>
-          <a:p>
-            <a:pPr marL="0" indent="0">
-              <a:buNone/>
-            </a:pPr>
-            <a:r>
-              <a:rPr lang="en-US" dirty="0" err="1">
-                <a:solidFill>
-                  <a:schemeClr val="accent6">
-                    <a:lumMod val="60000"/>
-                    <a:lumOff val="40000"/>
-                  </a:schemeClr>
-                </a:solidFill>
-              </a:rPr>
-              <a:t>Ffnbksdfd</a:t>
-            </a:r>
-            <a:endParaRPr lang="en-US" dirty="0">
-              <a:solidFill>
-                <a:schemeClr val="accent6">
-                  <a:lumMod val="60000"/>
-                  <a:lumOff val="40000"/>
-                </a:schemeClr>
-              </a:solidFill>
-            </a:endParaRPr>
-          </a:p>
-          <a:p>
-            <a:pPr marL="0" indent="0">
-              <a:buNone/>
-            </a:pPr>
-            <a:r>
-              <a:rPr lang="en-US" dirty="0" err="1">
-                <a:solidFill>
-                  <a:schemeClr val="accent6">
-                    <a:lumMod val="60000"/>
-                    <a:lumOff val="40000"/>
-                  </a:schemeClr>
-                </a:solidFill>
-              </a:rPr>
-              <a:t>Fdslj;f</a:t>
-            </a:r>
-            <a:endParaRPr lang="en-US" dirty="0">
-              <a:solidFill>
-                <a:schemeClr val="accent6">
-                  <a:lumMod val="60000"/>
-                  <a:lumOff val="40000"/>
-                </a:schemeClr>
-              </a:solidFill>
-            </a:endParaRPr>
-          </a:p>
-          <a:p>
-            <a:pPr marL="0" indent="0">
-              <a:buNone/>
-            </a:pPr>
-            <a:endParaRPr lang="en-US" dirty="0">
-              <a:solidFill>
-                <a:schemeClr val="accent6">
-                  <a:lumMod val="60000"/>
-                  <a:lumOff val="40000"/>
-                </a:schemeClr>
-              </a:solidFill>
-            </a:endParaRPr>
-          </a:p>
-          <a:p>
-            <a:pPr marL="0" indent="0">
-              <a:buNone/>
-            </a:pPr>
-            <a:r>
-              <a:rPr lang="en-US" dirty="0" err="1">
-                <a:solidFill>
-                  <a:schemeClr val="accent6">
-                    <a:lumMod val="60000"/>
-                    <a:lumOff val="40000"/>
-                  </a:schemeClr>
-                </a:solidFill>
-              </a:rPr>
-              <a:t>Fl;ds</a:t>
-            </a:r>
-            <a:endParaRPr lang="en-US" dirty="0">
-              <a:solidFill>
-                <a:schemeClr val="accent6">
-                  <a:lumMod val="60000"/>
-                  <a:lumOff val="40000"/>
-                </a:schemeClr>
-              </a:solidFill>
-            </a:endParaRPr>
-          </a:p>
-          <a:p>
-            <a:pPr marL="0" indent="0">
-              <a:buNone/>
-            </a:pPr>
-            <a:endParaRPr lang="en-US" dirty="0">
-              <a:solidFill>
-                <a:schemeClr val="accent6">
-                  <a:lumMod val="60000"/>
-                  <a:lumOff val="40000"/>
-                </a:schemeClr>
-              </a:solidFill>
-            </a:endParaRPr>
-          </a:p>
-        </p:txBody>
-      </p:sp>
-    </p:spTree>
-    <p:extLst>
-      <p:ext uri="{BB962C8B-B14F-4D97-AF65-F5344CB8AC3E}">
-        <p14:creationId xmlns:p14="http://schemas.microsoft.com/office/powerpoint/2010/main" val="366625378"/>
       </p:ext>
     </p:extLst>
   </p:cSld>
